--- a/templates/LeadGen_QBR_Template.pptx
+++ b/templates/LeadGen_QBR_Template.pptx
@@ -5,7 +5,7 @@
     <p:sldMasterId id="2147483648" r:id="rId1"/>
   </p:sldMasterIdLst>
   <p:notesMasterIdLst>
-    <p:notesMasterId r:id="rId29"/>
+    <p:notesMasterId r:id="rId32"/>
   </p:notesMasterIdLst>
   <p:sldIdLst>
     <p:sldId id="256" r:id="rId2"/>
@@ -29,12 +29,15 @@
     <p:sldId id="271" r:id="rId20"/>
     <p:sldId id="282" r:id="rId21"/>
     <p:sldId id="270" r:id="rId22"/>
-    <p:sldId id="283" r:id="rId23"/>
-    <p:sldId id="273" r:id="rId24"/>
-    <p:sldId id="272" r:id="rId25"/>
-    <p:sldId id="274" r:id="rId26"/>
-    <p:sldId id="275" r:id="rId27"/>
-    <p:sldId id="276" r:id="rId28"/>
+    <p:sldId id="286" r:id="rId23"/>
+    <p:sldId id="284" r:id="rId24"/>
+    <p:sldId id="287" r:id="rId25"/>
+    <p:sldId id="283" r:id="rId26"/>
+    <p:sldId id="273" r:id="rId27"/>
+    <p:sldId id="272" r:id="rId28"/>
+    <p:sldId id="274" r:id="rId29"/>
+    <p:sldId id="275" r:id="rId30"/>
+    <p:sldId id="276" r:id="rId31"/>
   </p:sldIdLst>
   <p:sldSz cx="12192000" cy="6858000"/>
   <p:notesSz cx="6858000" cy="9144000"/>
@@ -7090,7 +7093,7 @@
           <a:p>
             <a:fld id="{2BC69663-A7D4-4BC9-8F89-32BA51B76897}" type="datetimeFigureOut">
               <a:rPr lang="en-US" smtClean="0"/>
-              <a:t>15-Jul-26</a:t>
+              <a:t>06-Aug-26</a:t>
             </a:fld>
             <a:endParaRPr lang="en-US"/>
           </a:p>
@@ -7504,7 +7507,7 @@
           <a:p>
             <a:fld id="{A0B3163E-F649-4DB5-8064-529B49A45158}" type="datetimeFigureOut">
               <a:rPr lang="en-US" smtClean="0"/>
-              <a:t>15-Jul-26</a:t>
+              <a:t>06-Aug-26</a:t>
             </a:fld>
             <a:endParaRPr lang="en-US"/>
           </a:p>
@@ -7702,7 +7705,7 @@
           <a:p>
             <a:fld id="{A0B3163E-F649-4DB5-8064-529B49A45158}" type="datetimeFigureOut">
               <a:rPr lang="en-US" smtClean="0"/>
-              <a:t>15-Jul-26</a:t>
+              <a:t>06-Aug-26</a:t>
             </a:fld>
             <a:endParaRPr lang="en-US"/>
           </a:p>
@@ -7910,7 +7913,7 @@
           <a:p>
             <a:fld id="{A0B3163E-F649-4DB5-8064-529B49A45158}" type="datetimeFigureOut">
               <a:rPr lang="en-US" smtClean="0"/>
-              <a:t>15-Jul-26</a:t>
+              <a:t>06-Aug-26</a:t>
             </a:fld>
             <a:endParaRPr lang="en-US"/>
           </a:p>
@@ -10544,7 +10547,7 @@
           <a:p>
             <a:fld id="{A0B3163E-F649-4DB5-8064-529B49A45158}" type="datetimeFigureOut">
               <a:rPr lang="en-US" smtClean="0"/>
-              <a:t>15-Jul-26</a:t>
+              <a:t>06-Aug-26</a:t>
             </a:fld>
             <a:endParaRPr lang="en-US"/>
           </a:p>
@@ -11628,7 +11631,7 @@
           <a:p>
             <a:fld id="{A0B3163E-F649-4DB5-8064-529B49A45158}" type="datetimeFigureOut">
               <a:rPr lang="en-US" smtClean="0"/>
-              <a:t>15-Jul-26</a:t>
+              <a:t>06-Aug-26</a:t>
             </a:fld>
             <a:endParaRPr lang="en-US"/>
           </a:p>
@@ -11893,7 +11896,7 @@
           <a:p>
             <a:fld id="{A0B3163E-F649-4DB5-8064-529B49A45158}" type="datetimeFigureOut">
               <a:rPr lang="en-US" smtClean="0"/>
-              <a:t>15-Jul-26</a:t>
+              <a:t>06-Aug-26</a:t>
             </a:fld>
             <a:endParaRPr lang="en-US"/>
           </a:p>
@@ -12305,7 +12308,7 @@
           <a:p>
             <a:fld id="{A0B3163E-F649-4DB5-8064-529B49A45158}" type="datetimeFigureOut">
               <a:rPr lang="en-US" smtClean="0"/>
-              <a:t>15-Jul-26</a:t>
+              <a:t>06-Aug-26</a:t>
             </a:fld>
             <a:endParaRPr lang="en-US"/>
           </a:p>
@@ -12446,7 +12449,7 @@
           <a:p>
             <a:fld id="{A0B3163E-F649-4DB5-8064-529B49A45158}" type="datetimeFigureOut">
               <a:rPr lang="en-US" smtClean="0"/>
-              <a:t>15-Jul-26</a:t>
+              <a:t>06-Aug-26</a:t>
             </a:fld>
             <a:endParaRPr lang="en-US"/>
           </a:p>
@@ -12559,7 +12562,7 @@
           <a:p>
             <a:fld id="{A0B3163E-F649-4DB5-8064-529B49A45158}" type="datetimeFigureOut">
               <a:rPr lang="en-US" smtClean="0"/>
-              <a:t>15-Jul-26</a:t>
+              <a:t>06-Aug-26</a:t>
             </a:fld>
             <a:endParaRPr lang="en-US"/>
           </a:p>
@@ -12870,7 +12873,7 @@
           <a:p>
             <a:fld id="{A0B3163E-F649-4DB5-8064-529B49A45158}" type="datetimeFigureOut">
               <a:rPr lang="en-US" smtClean="0"/>
-              <a:t>15-Jul-26</a:t>
+              <a:t>06-Aug-26</a:t>
             </a:fld>
             <a:endParaRPr lang="en-US"/>
           </a:p>
@@ -13158,7 +13161,7 @@
           <a:p>
             <a:fld id="{A0B3163E-F649-4DB5-8064-529B49A45158}" type="datetimeFigureOut">
               <a:rPr lang="en-US" smtClean="0"/>
-              <a:t>15-Jul-26</a:t>
+              <a:t>06-Aug-26</a:t>
             </a:fld>
             <a:endParaRPr lang="en-US"/>
           </a:p>
@@ -13399,7 +13402,7 @@
           <a:p>
             <a:fld id="{A0B3163E-F649-4DB5-8064-529B49A45158}" type="datetimeFigureOut">
               <a:rPr lang="en-US" smtClean="0"/>
-              <a:t>15-Jul-26</a:t>
+              <a:t>06-Aug-26</a:t>
             </a:fld>
             <a:endParaRPr lang="en-US"/>
           </a:p>
@@ -19288,6 +19291,2557 @@
         <p:cNvPr id="1" name="">
           <a:extLst>
             <a:ext uri="{FF2B5EF4-FFF2-40B4-BE49-F238E27FC236}">
+              <a16:creationId xmlns:a16="http://schemas.microsoft.com/office/drawing/2014/main" id="{FB245E8C-6D74-35E3-5B58-2FA7635A8183}"/>
+            </a:ext>
+          </a:extLst>
+        </p:cNvPr>
+        <p:cNvGrpSpPr/>
+        <p:nvPr/>
+      </p:nvGrpSpPr>
+      <p:grpSpPr>
+        <a:xfrm>
+          <a:off x="0" y="0"/>
+          <a:ext cx="0" cy="0"/>
+          <a:chOff x="0" y="0"/>
+          <a:chExt cx="0" cy="0"/>
+        </a:xfrm>
+      </p:grpSpPr>
+      <p:sp>
+        <p:nvSpPr>
+          <p:cNvPr id="2" name="SECTION_AudienceInterest">
+            <a:extLst>
+              <a:ext uri="{FF2B5EF4-FFF2-40B4-BE49-F238E27FC236}">
+                <a16:creationId xmlns:a16="http://schemas.microsoft.com/office/drawing/2014/main" id="{366FB3C0-0307-6B63-50CD-DECABD198157}"/>
+              </a:ext>
+            </a:extLst>
+          </p:cNvPr>
+          <p:cNvSpPr>
+            <a:spLocks noGrp="1"/>
+          </p:cNvSpPr>
+          <p:nvPr>
+            <p:ph type="body" sz="quarter" idx="10"/>
+          </p:nvPr>
+        </p:nvSpPr>
+        <p:spPr>
+          <a:xfrm>
+            <a:off x="15875" y="2967228"/>
+            <a:ext cx="12176125" cy="1143000"/>
+          </a:xfrm>
+        </p:spPr>
+        <p:txBody>
+          <a:bodyPr wrap="square"/>
+          <a:lstStyle/>
+          <a:p>
+            <a:r>
+              <a:rPr lang="en-US" dirty="0"/>
+              <a:t>Where the Leads Are: Market-by-Market Breakdown</a:t>
+            </a:r>
+            <a:endParaRPr sz="3400" b="1" dirty="0">
+              <a:solidFill>
+                <a:srgbClr val="FFFFFF"/>
+              </a:solidFill>
+              <a:latin typeface="Montserrat" panose="00000500000000000000" pitchFamily="2" charset="0"/>
+            </a:endParaRPr>
+          </a:p>
+        </p:txBody>
+      </p:sp>
+    </p:spTree>
+    <p:extLst>
+      <p:ext uri="{BB962C8B-B14F-4D97-AF65-F5344CB8AC3E}">
+        <p14:creationId xmlns:p14="http://schemas.microsoft.com/office/powerpoint/2010/main" val="459970731"/>
+      </p:ext>
+    </p:extLst>
+  </p:cSld>
+  <p:clrMapOvr>
+    <a:masterClrMapping/>
+  </p:clrMapOvr>
+</p:sld>
+</file>
+
+<file path=ppt/slides/slide23.xml><?xml version="1.0" encoding="utf-8"?>
+<p:sld xmlns:a="http://schemas.openxmlformats.org/drawingml/2006/main" xmlns:r="http://schemas.openxmlformats.org/officeDocument/2006/relationships" xmlns:p="http://schemas.openxmlformats.org/presentationml/2006/main">
+  <p:cSld>
+    <p:spTree>
+      <p:nvGrpSpPr>
+        <p:cNvPr id="1" name="">
+          <a:extLst>
+            <a:ext uri="{FF2B5EF4-FFF2-40B4-BE49-F238E27FC236}">
+              <a16:creationId xmlns:a16="http://schemas.microsoft.com/office/drawing/2014/main" id="{3B22F0C0-10B2-ADB7-3101-B74B4DED52A7}"/>
+            </a:ext>
+          </a:extLst>
+        </p:cNvPr>
+        <p:cNvGrpSpPr/>
+        <p:nvPr/>
+      </p:nvGrpSpPr>
+      <p:grpSpPr>
+        <a:xfrm>
+          <a:off x="0" y="0"/>
+          <a:ext cx="0" cy="0"/>
+          <a:chOff x="0" y="0"/>
+          <a:chExt cx="0" cy="0"/>
+        </a:xfrm>
+      </p:grpSpPr>
+      <p:sp>
+        <p:nvSpPr>
+          <p:cNvPr id="52" name="Text 1">
+            <a:extLst>
+              <a:ext uri="{FF2B5EF4-FFF2-40B4-BE49-F238E27FC236}">
+                <a16:creationId xmlns:a16="http://schemas.microsoft.com/office/drawing/2014/main" id="{9AF553D4-C12B-660C-092B-8E90D7CB6105}"/>
+              </a:ext>
+            </a:extLst>
+          </p:cNvPr>
+          <p:cNvSpPr/>
+          <p:nvPr/>
+        </p:nvSpPr>
+        <p:spPr>
+          <a:xfrm>
+            <a:off x="661475" y="1261040"/>
+            <a:ext cx="10868745" cy="590550"/>
+          </a:xfrm>
+          <a:prstGeom prst="rect">
+            <a:avLst/>
+          </a:prstGeom>
+          <a:noFill/>
+          <a:ln/>
+        </p:spPr>
+        <p:txBody>
+          <a:bodyPr wrap="square" lIns="0" tIns="0" rIns="0" bIns="0" rtlCol="0" anchor="t">
+            <a:normAutofit/>
+          </a:bodyPr>
+          <a:lstStyle/>
+          <a:p>
+            <a:pPr marL="0" indent="0" algn="l">
+              <a:lnSpc>
+                <a:spcPct val="132000"/>
+              </a:lnSpc>
+              <a:buNone/>
+            </a:pPr>
+            <a:r>
+              <a:rPr lang="en-US" sz="1450" dirty="0">
+                <a:solidFill>
+                  <a:srgbClr val="4C4C4D"/>
+                </a:solidFill>
+                <a:latin typeface="Montserrat Medium" panose="00000600000000000000" pitchFamily="2" charset="0"/>
+                <a:ea typeface="Heebo" pitchFamily="34" charset="-122"/>
+                <a:cs typeface="Heebo" pitchFamily="34" charset="-120"/>
+              </a:rPr>
+              <a:t>Distribution of </a:t>
+            </a:r>
+            <a:r>
+              <a:rPr lang="en-US" sz="1450" b="1" dirty="0">
+                <a:solidFill>
+                  <a:srgbClr val="1C6BFF"/>
+                </a:solidFill>
+                <a:latin typeface="Montserrat" panose="00000500000000000000" pitchFamily="2" charset="0"/>
+                <a:ea typeface="Heebo Bold" pitchFamily="34" charset="-122"/>
+                <a:cs typeface="Heebo Bold" pitchFamily="34" charset="-120"/>
+              </a:rPr>
+              <a:t>1,372 total leads</a:t>
+            </a:r>
+            <a:r>
+              <a:rPr lang="en-US" sz="1450" dirty="0">
+                <a:solidFill>
+                  <a:srgbClr val="4C4C4D"/>
+                </a:solidFill>
+                <a:latin typeface="Montserrat Medium" panose="00000600000000000000" pitchFamily="2" charset="0"/>
+                <a:ea typeface="Heebo" pitchFamily="34" charset="-122"/>
+                <a:cs typeface="Heebo" pitchFamily="34" charset="-120"/>
+              </a:rPr>
+              <a:t> across five European markets. The United Kingdom leads the pipeline, Germany is the strongest secondary market, and Spain, France, and Italy represent emerging growth potential.</a:t>
+            </a:r>
+            <a:endParaRPr lang="en-US" sz="1450" dirty="0">
+              <a:latin typeface="Montserrat Medium" panose="00000600000000000000" pitchFamily="2" charset="0"/>
+            </a:endParaRPr>
+          </a:p>
+        </p:txBody>
+      </p:sp>
+      <p:sp>
+        <p:nvSpPr>
+          <p:cNvPr id="54" name="Shape 2">
+            <a:extLst>
+              <a:ext uri="{FF2B5EF4-FFF2-40B4-BE49-F238E27FC236}">
+                <a16:creationId xmlns:a16="http://schemas.microsoft.com/office/drawing/2014/main" id="{ED0B5A6D-5ACC-40E7-6E37-F579FAB9EAF8}"/>
+              </a:ext>
+            </a:extLst>
+          </p:cNvPr>
+          <p:cNvSpPr/>
+          <p:nvPr/>
+        </p:nvSpPr>
+        <p:spPr>
+          <a:xfrm>
+            <a:off x="661475" y="4301133"/>
+            <a:ext cx="10868745" cy="25400"/>
+          </a:xfrm>
+          <a:prstGeom prst="roundRect">
+            <a:avLst>
+              <a:gd name="adj" fmla="val 49999"/>
+            </a:avLst>
+          </a:prstGeom>
+          <a:solidFill>
+            <a:srgbClr val="D8D4D4"/>
+          </a:solidFill>
+          <a:ln/>
+          <a:effectLst>
+            <a:outerShdw blurRad="63500" sx="102000" sy="102000" algn="ctr" rotWithShape="0">
+              <a:prstClr val="black">
+                <a:alpha val="40000"/>
+              </a:prstClr>
+            </a:outerShdw>
+          </a:effectLst>
+        </p:spPr>
+        <p:txBody>
+          <a:bodyPr/>
+          <a:lstStyle/>
+          <a:p>
+            <a:endParaRPr lang="en-US" sz="1400" b="1" dirty="0">
+              <a:latin typeface="Montserrat" panose="00000500000000000000" pitchFamily="2" charset="0"/>
+            </a:endParaRPr>
+          </a:p>
+        </p:txBody>
+      </p:sp>
+      <p:sp>
+        <p:nvSpPr>
+          <p:cNvPr id="56" name="Shape 3">
+            <a:extLst>
+              <a:ext uri="{FF2B5EF4-FFF2-40B4-BE49-F238E27FC236}">
+                <a16:creationId xmlns:a16="http://schemas.microsoft.com/office/drawing/2014/main" id="{9028FA9C-25A2-7177-7007-6CB690367310}"/>
+              </a:ext>
+            </a:extLst>
+          </p:cNvPr>
+          <p:cNvSpPr/>
+          <p:nvPr/>
+        </p:nvSpPr>
+        <p:spPr>
+          <a:xfrm>
+            <a:off x="661475" y="2423021"/>
+            <a:ext cx="1990576" cy="1878112"/>
+          </a:xfrm>
+          <a:custGeom>
+            <a:avLst/>
+            <a:gdLst/>
+            <a:ahLst/>
+            <a:cxnLst/>
+            <a:rect l="l" t="t" r="r" b="b"/>
+            <a:pathLst>
+              <a:path w="1990576" h="1878112">
+                <a:moveTo>
+                  <a:pt x="23258" y="0"/>
+                </a:moveTo>
+                <a:lnTo>
+                  <a:pt x="1967318" y="0"/>
+                </a:lnTo>
+                <a:arcTo wR="23258" hR="23259" stAng="16200000" swAng="5400000"/>
+                <a:lnTo>
+                  <a:pt x="1990576" y="1878112"/>
+                </a:lnTo>
+                <a:lnTo>
+                  <a:pt x="0" y="1878112"/>
+                </a:lnTo>
+                <a:lnTo>
+                  <a:pt x="0" y="23259"/>
+                </a:lnTo>
+                <a:arcTo wR="23258" hR="23259" stAng="10800000" swAng="5400000"/>
+                <a:close/>
+              </a:path>
+            </a:pathLst>
+          </a:custGeom>
+          <a:solidFill>
+            <a:srgbClr val="F3F4F9"/>
+          </a:solidFill>
+          <a:ln>
+            <a:noFill/>
+          </a:ln>
+          <a:effectLst>
+            <a:outerShdw blurRad="63500" sx="102000" sy="102000" algn="ctr" rotWithShape="0">
+              <a:prstClr val="black">
+                <a:alpha val="40000"/>
+              </a:prstClr>
+            </a:outerShdw>
+          </a:effectLst>
+        </p:spPr>
+        <p:style>
+          <a:lnRef idx="1">
+            <a:schemeClr val="accent1"/>
+          </a:lnRef>
+          <a:fillRef idx="3">
+            <a:schemeClr val="accent1"/>
+          </a:fillRef>
+          <a:effectRef idx="2">
+            <a:schemeClr val="accent1"/>
+          </a:effectRef>
+          <a:fontRef idx="minor">
+            <a:schemeClr val="lt1"/>
+          </a:fontRef>
+        </p:style>
+        <p:txBody>
+          <a:bodyPr rtlCol="0" anchor="ctr"/>
+          <a:lstStyle/>
+          <a:p>
+            <a:pPr algn="ctr"/>
+            <a:endParaRPr lang="en-US" dirty="0">
+              <a:latin typeface="Montserrat" panose="00000500000000000000" pitchFamily="2" charset="0"/>
+            </a:endParaRPr>
+          </a:p>
+        </p:txBody>
+      </p:sp>
+      <p:sp>
+        <p:nvSpPr>
+          <p:cNvPr id="58" name="Text 4">
+            <a:extLst>
+              <a:ext uri="{FF2B5EF4-FFF2-40B4-BE49-F238E27FC236}">
+                <a16:creationId xmlns:a16="http://schemas.microsoft.com/office/drawing/2014/main" id="{19629F8B-5954-4BBE-7A0B-44F82F33AFE8}"/>
+              </a:ext>
+            </a:extLst>
+          </p:cNvPr>
+          <p:cNvSpPr/>
+          <p:nvPr/>
+        </p:nvSpPr>
+        <p:spPr>
+          <a:xfrm>
+            <a:off x="847505" y="2609056"/>
+            <a:ext cx="1618515" cy="290711"/>
+          </a:xfrm>
+          <a:prstGeom prst="rect">
+            <a:avLst/>
+          </a:prstGeom>
+          <a:noFill/>
+          <a:ln/>
+        </p:spPr>
+        <p:txBody>
+          <a:bodyPr wrap="none" lIns="0" tIns="0" rIns="0" bIns="0" rtlCol="0" anchor="t"/>
+          <a:lstStyle/>
+          <a:p>
+            <a:pPr marL="0" indent="0" algn="ctr">
+              <a:lnSpc>
+                <a:spcPct val="104000"/>
+              </a:lnSpc>
+              <a:buNone/>
+            </a:pPr>
+            <a:r>
+              <a:rPr lang="en-US" sz="1600" b="1" dirty="0">
+                <a:solidFill>
+                  <a:srgbClr val="4C4C4D"/>
+                </a:solidFill>
+                <a:latin typeface="Montserrat" panose="00000500000000000000" pitchFamily="2" charset="0"/>
+                <a:ea typeface="Crimson Pro SemiBold" pitchFamily="34" charset="-122"/>
+                <a:cs typeface="Crimson Pro SemiBold" pitchFamily="34" charset="-120"/>
+              </a:rPr>
+              <a:t>United Kingdom</a:t>
+            </a:r>
+            <a:endParaRPr lang="en-US" sz="1600" b="1" dirty="0">
+              <a:latin typeface="Montserrat" panose="00000500000000000000" pitchFamily="2" charset="0"/>
+            </a:endParaRPr>
+          </a:p>
+        </p:txBody>
+      </p:sp>
+      <p:sp>
+        <p:nvSpPr>
+          <p:cNvPr id="60" name="Text 5">
+            <a:extLst>
+              <a:ext uri="{FF2B5EF4-FFF2-40B4-BE49-F238E27FC236}">
+                <a16:creationId xmlns:a16="http://schemas.microsoft.com/office/drawing/2014/main" id="{AD669E3E-5291-35E7-8480-0A4137653344}"/>
+              </a:ext>
+            </a:extLst>
+          </p:cNvPr>
+          <p:cNvSpPr/>
+          <p:nvPr/>
+        </p:nvSpPr>
+        <p:spPr>
+          <a:xfrm>
+            <a:off x="847505" y="3009602"/>
+            <a:ext cx="1618515" cy="1105495"/>
+          </a:xfrm>
+          <a:prstGeom prst="rect">
+            <a:avLst/>
+          </a:prstGeom>
+          <a:noFill/>
+          <a:ln/>
+        </p:spPr>
+        <p:txBody>
+          <a:bodyPr wrap="square" lIns="0" tIns="0" rIns="0" bIns="0" rtlCol="0" anchor="t"/>
+          <a:lstStyle/>
+          <a:p>
+            <a:pPr marL="0" indent="0" algn="ctr">
+              <a:lnSpc>
+                <a:spcPct val="132000"/>
+              </a:lnSpc>
+              <a:spcAft>
+                <a:spcPts val="850"/>
+              </a:spcAft>
+              <a:buNone/>
+            </a:pPr>
+            <a:r>
+              <a:rPr lang="en-US" sz="1350" b="1" dirty="0">
+                <a:solidFill>
+                  <a:srgbClr val="4C4C4D"/>
+                </a:solidFill>
+                <a:latin typeface="Montserrat" panose="00000500000000000000" pitchFamily="2" charset="0"/>
+                <a:ea typeface="Heebo Bold" pitchFamily="34" charset="-122"/>
+                <a:cs typeface="Heebo Bold" pitchFamily="34" charset="-120"/>
+              </a:rPr>
+              <a:t>744 leads</a:t>
+            </a:r>
+            <a:endParaRPr lang="en-US" sz="1350" dirty="0">
+              <a:latin typeface="Montserrat" panose="00000500000000000000" pitchFamily="2" charset="0"/>
+            </a:endParaRPr>
+          </a:p>
+          <a:p>
+            <a:pPr algn="ctr">
+              <a:lnSpc>
+                <a:spcPct val="132000"/>
+              </a:lnSpc>
+              <a:spcAft>
+                <a:spcPts val="850"/>
+              </a:spcAft>
+            </a:pPr>
+            <a:r>
+              <a:rPr lang="en-US" sz="1500" b="1" dirty="0">
+                <a:solidFill>
+                  <a:srgbClr val="1C6BFF"/>
+                </a:solidFill>
+                <a:latin typeface="Montserrat" panose="00000500000000000000" pitchFamily="2" charset="0"/>
+                <a:cs typeface="Heebo" pitchFamily="34" charset="-120"/>
+              </a:rPr>
+              <a:t>58.2%</a:t>
+            </a:r>
+          </a:p>
+          <a:p>
+            <a:pPr algn="ctr">
+              <a:lnSpc>
+                <a:spcPct val="132000"/>
+              </a:lnSpc>
+            </a:pPr>
+            <a:r>
+              <a:rPr lang="en-US" sz="1350" dirty="0">
+                <a:solidFill>
+                  <a:srgbClr val="4C4C4D"/>
+                </a:solidFill>
+                <a:latin typeface="Montserrat Medium" panose="00000600000000000000" pitchFamily="2" charset="0"/>
+                <a:cs typeface="Heebo" pitchFamily="34" charset="-120"/>
+              </a:rPr>
+              <a:t>Core Market</a:t>
+            </a:r>
+          </a:p>
+        </p:txBody>
+      </p:sp>
+      <p:sp>
+        <p:nvSpPr>
+          <p:cNvPr id="62" name="Shape 6">
+            <a:extLst>
+              <a:ext uri="{FF2B5EF4-FFF2-40B4-BE49-F238E27FC236}">
+                <a16:creationId xmlns:a16="http://schemas.microsoft.com/office/drawing/2014/main" id="{AAE3EE38-F2F1-D23A-EA1F-480F723060BF}"/>
+              </a:ext>
+            </a:extLst>
+          </p:cNvPr>
+          <p:cNvSpPr/>
+          <p:nvPr/>
+        </p:nvSpPr>
+        <p:spPr>
+          <a:xfrm>
+            <a:off x="2880943" y="4326533"/>
+            <a:ext cx="1990675" cy="1878112"/>
+          </a:xfrm>
+          <a:custGeom>
+            <a:avLst/>
+            <a:gdLst/>
+            <a:ahLst/>
+            <a:cxnLst/>
+            <a:rect l="l" t="t" r="r" b="b"/>
+            <a:pathLst>
+              <a:path w="1990675" h="1878112">
+                <a:moveTo>
+                  <a:pt x="0" y="0"/>
+                </a:moveTo>
+                <a:lnTo>
+                  <a:pt x="1990675" y="0"/>
+                </a:lnTo>
+                <a:lnTo>
+                  <a:pt x="1990675" y="1854853"/>
+                </a:lnTo>
+                <a:arcTo wR="23258" hR="23259" stAng="0" swAng="5400000"/>
+                <a:lnTo>
+                  <a:pt x="23258" y="1878112"/>
+                </a:lnTo>
+                <a:arcTo wR="23258" hR="23259" stAng="5400000" swAng="5400000"/>
+                <a:lnTo>
+                  <a:pt x="0" y="0"/>
+                </a:lnTo>
+                <a:close/>
+              </a:path>
+            </a:pathLst>
+          </a:custGeom>
+          <a:solidFill>
+            <a:srgbClr val="F3F4F9"/>
+          </a:solidFill>
+          <a:ln>
+            <a:noFill/>
+          </a:ln>
+          <a:effectLst>
+            <a:outerShdw blurRad="63500" sx="102000" sy="102000" algn="ctr" rotWithShape="0">
+              <a:prstClr val="black">
+                <a:alpha val="40000"/>
+              </a:prstClr>
+            </a:outerShdw>
+          </a:effectLst>
+        </p:spPr>
+        <p:style>
+          <a:lnRef idx="1">
+            <a:schemeClr val="accent1"/>
+          </a:lnRef>
+          <a:fillRef idx="3">
+            <a:schemeClr val="accent1"/>
+          </a:fillRef>
+          <a:effectRef idx="2">
+            <a:schemeClr val="accent1"/>
+          </a:effectRef>
+          <a:fontRef idx="minor">
+            <a:schemeClr val="lt1"/>
+          </a:fontRef>
+        </p:style>
+        <p:txBody>
+          <a:bodyPr rtlCol="0" anchor="ctr"/>
+          <a:lstStyle/>
+          <a:p>
+            <a:pPr algn="ctr"/>
+            <a:endParaRPr lang="en-US">
+              <a:solidFill>
+                <a:schemeClr val="lt1"/>
+              </a:solidFill>
+              <a:latin typeface="Montserrat" panose="00000500000000000000" pitchFamily="2" charset="0"/>
+            </a:endParaRPr>
+          </a:p>
+        </p:txBody>
+      </p:sp>
+      <p:sp>
+        <p:nvSpPr>
+          <p:cNvPr id="64" name="Text 7">
+            <a:extLst>
+              <a:ext uri="{FF2B5EF4-FFF2-40B4-BE49-F238E27FC236}">
+                <a16:creationId xmlns:a16="http://schemas.microsoft.com/office/drawing/2014/main" id="{4715EDE8-91CF-9A6C-BEEE-2AD93DAD748F}"/>
+              </a:ext>
+            </a:extLst>
+          </p:cNvPr>
+          <p:cNvSpPr/>
+          <p:nvPr/>
+        </p:nvSpPr>
+        <p:spPr>
+          <a:xfrm>
+            <a:off x="3066973" y="4512568"/>
+            <a:ext cx="1618614" cy="290711"/>
+          </a:xfrm>
+          <a:prstGeom prst="rect">
+            <a:avLst/>
+          </a:prstGeom>
+          <a:noFill/>
+          <a:ln/>
+        </p:spPr>
+        <p:txBody>
+          <a:bodyPr wrap="none" lIns="0" tIns="0" rIns="0" bIns="0" rtlCol="0" anchor="t"/>
+          <a:lstStyle/>
+          <a:p>
+            <a:pPr marL="0" indent="0" algn="ctr">
+              <a:lnSpc>
+                <a:spcPct val="104000"/>
+              </a:lnSpc>
+              <a:buNone/>
+            </a:pPr>
+            <a:r>
+              <a:rPr lang="en-US" sz="1600" b="1" dirty="0">
+                <a:solidFill>
+                  <a:srgbClr val="4C4C4D"/>
+                </a:solidFill>
+                <a:latin typeface="Montserrat" panose="00000500000000000000" pitchFamily="2" charset="0"/>
+              </a:rPr>
+              <a:t>Germany</a:t>
+            </a:r>
+          </a:p>
+        </p:txBody>
+      </p:sp>
+      <p:sp>
+        <p:nvSpPr>
+          <p:cNvPr id="66" name="Text 8">
+            <a:extLst>
+              <a:ext uri="{FF2B5EF4-FFF2-40B4-BE49-F238E27FC236}">
+                <a16:creationId xmlns:a16="http://schemas.microsoft.com/office/drawing/2014/main" id="{74FFBC29-6C99-ABFF-ED14-991ECEE03ED2}"/>
+              </a:ext>
+            </a:extLst>
+          </p:cNvPr>
+          <p:cNvSpPr/>
+          <p:nvPr/>
+        </p:nvSpPr>
+        <p:spPr>
+          <a:xfrm>
+            <a:off x="3066973" y="4913114"/>
+            <a:ext cx="1618614" cy="1105495"/>
+          </a:xfrm>
+          <a:prstGeom prst="rect">
+            <a:avLst/>
+          </a:prstGeom>
+          <a:noFill/>
+          <a:ln/>
+        </p:spPr>
+        <p:txBody>
+          <a:bodyPr wrap="square" lIns="0" tIns="0" rIns="0" bIns="0" rtlCol="0" anchor="t"/>
+          <a:lstStyle/>
+          <a:p>
+            <a:pPr marL="0" indent="0" algn="ctr">
+              <a:lnSpc>
+                <a:spcPct val="132000"/>
+              </a:lnSpc>
+              <a:spcAft>
+                <a:spcPts val="850"/>
+              </a:spcAft>
+              <a:buNone/>
+            </a:pPr>
+            <a:r>
+              <a:rPr lang="en-US" sz="1350" b="1" dirty="0">
+                <a:solidFill>
+                  <a:srgbClr val="4C4C4D"/>
+                </a:solidFill>
+                <a:latin typeface="Montserrat" panose="00000500000000000000" pitchFamily="2" charset="0"/>
+                <a:ea typeface="Heebo Bold" pitchFamily="34" charset="-122"/>
+                <a:cs typeface="Heebo Bold" pitchFamily="34" charset="-120"/>
+              </a:rPr>
+              <a:t>311 leads</a:t>
+            </a:r>
+            <a:endParaRPr lang="en-US" sz="1350" dirty="0">
+              <a:latin typeface="Montserrat" panose="00000500000000000000" pitchFamily="2" charset="0"/>
+            </a:endParaRPr>
+          </a:p>
+          <a:p>
+            <a:pPr indent="0" algn="ctr">
+              <a:lnSpc>
+                <a:spcPct val="132000"/>
+              </a:lnSpc>
+              <a:spcAft>
+                <a:spcPts val="850"/>
+              </a:spcAft>
+              <a:buNone/>
+            </a:pPr>
+            <a:r>
+              <a:rPr lang="en-US" sz="1500" b="1" dirty="0">
+                <a:solidFill>
+                  <a:srgbClr val="1C6BFF"/>
+                </a:solidFill>
+                <a:latin typeface="Montserrat" panose="00000500000000000000" pitchFamily="2" charset="0"/>
+                <a:cs typeface="Heebo" pitchFamily="34" charset="-120"/>
+              </a:rPr>
+              <a:t>24.3%</a:t>
+            </a:r>
+          </a:p>
+          <a:p>
+            <a:pPr marL="0" indent="0" algn="ctr">
+              <a:lnSpc>
+                <a:spcPct val="132000"/>
+              </a:lnSpc>
+              <a:buNone/>
+            </a:pPr>
+            <a:r>
+              <a:rPr lang="en-US" sz="1350" dirty="0">
+                <a:solidFill>
+                  <a:srgbClr val="4C4C4D"/>
+                </a:solidFill>
+                <a:latin typeface="Montserrat Medium" panose="00000600000000000000" pitchFamily="2" charset="0"/>
+                <a:ea typeface="Heebo" pitchFamily="34" charset="-122"/>
+                <a:cs typeface="Heebo" pitchFamily="34" charset="-120"/>
+              </a:rPr>
+              <a:t>Core Market</a:t>
+            </a:r>
+            <a:endParaRPr lang="en-US" sz="1350" dirty="0">
+              <a:latin typeface="Montserrat Medium" panose="00000600000000000000" pitchFamily="2" charset="0"/>
+            </a:endParaRPr>
+          </a:p>
+        </p:txBody>
+      </p:sp>
+      <p:sp>
+        <p:nvSpPr>
+          <p:cNvPr id="68" name="Shape 9">
+            <a:extLst>
+              <a:ext uri="{FF2B5EF4-FFF2-40B4-BE49-F238E27FC236}">
+                <a16:creationId xmlns:a16="http://schemas.microsoft.com/office/drawing/2014/main" id="{39750C2C-C09D-8DF0-AD0F-48CAC27B47B1}"/>
+              </a:ext>
+            </a:extLst>
+          </p:cNvPr>
+          <p:cNvSpPr/>
+          <p:nvPr/>
+        </p:nvSpPr>
+        <p:spPr>
+          <a:xfrm>
+            <a:off x="5100510" y="2423021"/>
+            <a:ext cx="1990576" cy="1878112"/>
+          </a:xfrm>
+          <a:custGeom>
+            <a:avLst/>
+            <a:gdLst/>
+            <a:ahLst/>
+            <a:cxnLst/>
+            <a:rect l="l" t="t" r="r" b="b"/>
+            <a:pathLst>
+              <a:path w="1990576" h="1878112">
+                <a:moveTo>
+                  <a:pt x="23258" y="0"/>
+                </a:moveTo>
+                <a:lnTo>
+                  <a:pt x="1967318" y="0"/>
+                </a:lnTo>
+                <a:arcTo wR="23258" hR="23259" stAng="16200000" swAng="5400000"/>
+                <a:lnTo>
+                  <a:pt x="1990576" y="1878112"/>
+                </a:lnTo>
+                <a:lnTo>
+                  <a:pt x="0" y="1878112"/>
+                </a:lnTo>
+                <a:lnTo>
+                  <a:pt x="0" y="23259"/>
+                </a:lnTo>
+                <a:arcTo wR="23258" hR="23259" stAng="10800000" swAng="5400000"/>
+                <a:close/>
+              </a:path>
+            </a:pathLst>
+          </a:custGeom>
+          <a:solidFill>
+            <a:srgbClr val="F3F4F9"/>
+          </a:solidFill>
+          <a:ln>
+            <a:noFill/>
+          </a:ln>
+          <a:effectLst>
+            <a:outerShdw blurRad="63500" sx="102000" sy="102000" algn="ctr" rotWithShape="0">
+              <a:prstClr val="black">
+                <a:alpha val="40000"/>
+              </a:prstClr>
+            </a:outerShdw>
+          </a:effectLst>
+        </p:spPr>
+        <p:style>
+          <a:lnRef idx="1">
+            <a:schemeClr val="accent1"/>
+          </a:lnRef>
+          <a:fillRef idx="3">
+            <a:schemeClr val="accent1"/>
+          </a:fillRef>
+          <a:effectRef idx="2">
+            <a:schemeClr val="accent1"/>
+          </a:effectRef>
+          <a:fontRef idx="minor">
+            <a:schemeClr val="lt1"/>
+          </a:fontRef>
+        </p:style>
+        <p:txBody>
+          <a:bodyPr rtlCol="0" anchor="ctr"/>
+          <a:lstStyle/>
+          <a:p>
+            <a:pPr algn="ctr"/>
+            <a:endParaRPr lang="en-US">
+              <a:solidFill>
+                <a:schemeClr val="lt1"/>
+              </a:solidFill>
+              <a:latin typeface="Montserrat" panose="00000500000000000000" pitchFamily="2" charset="0"/>
+            </a:endParaRPr>
+          </a:p>
+        </p:txBody>
+      </p:sp>
+      <p:sp>
+        <p:nvSpPr>
+          <p:cNvPr id="70" name="Text 10">
+            <a:extLst>
+              <a:ext uri="{FF2B5EF4-FFF2-40B4-BE49-F238E27FC236}">
+                <a16:creationId xmlns:a16="http://schemas.microsoft.com/office/drawing/2014/main" id="{63D5AC41-FCDC-1E12-F79C-CF6D97EE3290}"/>
+              </a:ext>
+            </a:extLst>
+          </p:cNvPr>
+          <p:cNvSpPr/>
+          <p:nvPr/>
+        </p:nvSpPr>
+        <p:spPr>
+          <a:xfrm>
+            <a:off x="5286540" y="2609056"/>
+            <a:ext cx="1618515" cy="290711"/>
+          </a:xfrm>
+          <a:prstGeom prst="rect">
+            <a:avLst/>
+          </a:prstGeom>
+          <a:noFill/>
+          <a:ln/>
+        </p:spPr>
+        <p:txBody>
+          <a:bodyPr wrap="none" lIns="0" tIns="0" rIns="0" bIns="0" rtlCol="0" anchor="t"/>
+          <a:lstStyle/>
+          <a:p>
+            <a:pPr algn="ctr">
+              <a:lnSpc>
+                <a:spcPct val="104000"/>
+              </a:lnSpc>
+            </a:pPr>
+            <a:r>
+              <a:rPr lang="en-US" sz="1600" b="1" dirty="0">
+                <a:solidFill>
+                  <a:srgbClr val="4C4C4D"/>
+                </a:solidFill>
+                <a:latin typeface="Montserrat" panose="00000500000000000000" pitchFamily="2" charset="0"/>
+              </a:rPr>
+              <a:t>Spain</a:t>
+            </a:r>
+          </a:p>
+        </p:txBody>
+      </p:sp>
+      <p:sp>
+        <p:nvSpPr>
+          <p:cNvPr id="72" name="Text 11">
+            <a:extLst>
+              <a:ext uri="{FF2B5EF4-FFF2-40B4-BE49-F238E27FC236}">
+                <a16:creationId xmlns:a16="http://schemas.microsoft.com/office/drawing/2014/main" id="{663C507F-DEF9-229E-258E-92DCACB5C56F}"/>
+              </a:ext>
+            </a:extLst>
+          </p:cNvPr>
+          <p:cNvSpPr/>
+          <p:nvPr/>
+        </p:nvSpPr>
+        <p:spPr>
+          <a:xfrm>
+            <a:off x="5166360" y="3009602"/>
+            <a:ext cx="1924726" cy="1105495"/>
+          </a:xfrm>
+          <a:prstGeom prst="rect">
+            <a:avLst/>
+          </a:prstGeom>
+          <a:noFill/>
+          <a:ln/>
+        </p:spPr>
+        <p:txBody>
+          <a:bodyPr wrap="square" lIns="0" tIns="0" rIns="0" bIns="0" rtlCol="0" anchor="t"/>
+          <a:lstStyle/>
+          <a:p>
+            <a:pPr marL="0" indent="0" algn="ctr">
+              <a:lnSpc>
+                <a:spcPct val="132000"/>
+              </a:lnSpc>
+              <a:spcAft>
+                <a:spcPts val="850"/>
+              </a:spcAft>
+              <a:buNone/>
+            </a:pPr>
+            <a:r>
+              <a:rPr lang="en-US" sz="1350" b="1" dirty="0">
+                <a:solidFill>
+                  <a:srgbClr val="4C4C4D"/>
+                </a:solidFill>
+                <a:latin typeface="Montserrat" panose="00000500000000000000" pitchFamily="2" charset="0"/>
+                <a:ea typeface="Heebo Bold" pitchFamily="34" charset="-122"/>
+                <a:cs typeface="Heebo Bold" pitchFamily="34" charset="-120"/>
+              </a:rPr>
+              <a:t>172 leads</a:t>
+            </a:r>
+            <a:endParaRPr lang="en-US" sz="1350" dirty="0">
+              <a:latin typeface="Montserrat" panose="00000500000000000000" pitchFamily="2" charset="0"/>
+            </a:endParaRPr>
+          </a:p>
+          <a:p>
+            <a:pPr indent="0" algn="ctr">
+              <a:lnSpc>
+                <a:spcPct val="132000"/>
+              </a:lnSpc>
+              <a:spcAft>
+                <a:spcPts val="850"/>
+              </a:spcAft>
+              <a:buNone/>
+            </a:pPr>
+            <a:r>
+              <a:rPr lang="en-US" sz="1500" b="1" dirty="0">
+                <a:solidFill>
+                  <a:srgbClr val="1C6BFF"/>
+                </a:solidFill>
+                <a:latin typeface="Montserrat" panose="00000500000000000000" pitchFamily="2" charset="0"/>
+                <a:cs typeface="Heebo" pitchFamily="34" charset="-120"/>
+              </a:rPr>
+              <a:t>13.4%</a:t>
+            </a:r>
+          </a:p>
+          <a:p>
+            <a:pPr marL="0" indent="0" algn="ctr">
+              <a:lnSpc>
+                <a:spcPct val="132000"/>
+              </a:lnSpc>
+              <a:spcAft>
+                <a:spcPts val="850"/>
+              </a:spcAft>
+              <a:buNone/>
+            </a:pPr>
+            <a:r>
+              <a:rPr lang="en-US" sz="1350" dirty="0">
+                <a:solidFill>
+                  <a:srgbClr val="4C4C4D"/>
+                </a:solidFill>
+                <a:latin typeface="Montserrat Medium" panose="00000600000000000000" pitchFamily="2" charset="0"/>
+                <a:ea typeface="Heebo" pitchFamily="34" charset="-122"/>
+                <a:cs typeface="Heebo" pitchFamily="34" charset="-120"/>
+              </a:rPr>
+              <a:t>Growth Opportunity</a:t>
+            </a:r>
+            <a:endParaRPr lang="en-US" sz="1350" dirty="0">
+              <a:latin typeface="Montserrat Medium" panose="00000600000000000000" pitchFamily="2" charset="0"/>
+            </a:endParaRPr>
+          </a:p>
+        </p:txBody>
+      </p:sp>
+      <p:sp>
+        <p:nvSpPr>
+          <p:cNvPr id="74" name="Shape 12">
+            <a:extLst>
+              <a:ext uri="{FF2B5EF4-FFF2-40B4-BE49-F238E27FC236}">
+                <a16:creationId xmlns:a16="http://schemas.microsoft.com/office/drawing/2014/main" id="{4F036B64-1999-EEB2-DDB7-188733239403}"/>
+              </a:ext>
+            </a:extLst>
+          </p:cNvPr>
+          <p:cNvSpPr/>
+          <p:nvPr/>
+        </p:nvSpPr>
+        <p:spPr>
+          <a:xfrm>
+            <a:off x="7319978" y="4326533"/>
+            <a:ext cx="1990675" cy="1878112"/>
+          </a:xfrm>
+          <a:custGeom>
+            <a:avLst/>
+            <a:gdLst/>
+            <a:ahLst/>
+            <a:cxnLst/>
+            <a:rect l="l" t="t" r="r" b="b"/>
+            <a:pathLst>
+              <a:path w="1990675" h="1878112">
+                <a:moveTo>
+                  <a:pt x="0" y="0"/>
+                </a:moveTo>
+                <a:lnTo>
+                  <a:pt x="1990675" y="0"/>
+                </a:lnTo>
+                <a:lnTo>
+                  <a:pt x="1990675" y="1854853"/>
+                </a:lnTo>
+                <a:arcTo wR="23258" hR="23259" stAng="0" swAng="5400000"/>
+                <a:lnTo>
+                  <a:pt x="23258" y="1878112"/>
+                </a:lnTo>
+                <a:arcTo wR="23258" hR="23259" stAng="5400000" swAng="5400000"/>
+                <a:lnTo>
+                  <a:pt x="0" y="0"/>
+                </a:lnTo>
+                <a:close/>
+              </a:path>
+            </a:pathLst>
+          </a:custGeom>
+          <a:solidFill>
+            <a:srgbClr val="F3F4F9"/>
+          </a:solidFill>
+          <a:ln>
+            <a:noFill/>
+          </a:ln>
+          <a:effectLst>
+            <a:outerShdw blurRad="63500" sx="102000" sy="102000" algn="ctr" rotWithShape="0">
+              <a:prstClr val="black">
+                <a:alpha val="40000"/>
+              </a:prstClr>
+            </a:outerShdw>
+          </a:effectLst>
+        </p:spPr>
+        <p:style>
+          <a:lnRef idx="1">
+            <a:schemeClr val="accent1"/>
+          </a:lnRef>
+          <a:fillRef idx="3">
+            <a:schemeClr val="accent1"/>
+          </a:fillRef>
+          <a:effectRef idx="2">
+            <a:schemeClr val="accent1"/>
+          </a:effectRef>
+          <a:fontRef idx="minor">
+            <a:schemeClr val="lt1"/>
+          </a:fontRef>
+        </p:style>
+        <p:txBody>
+          <a:bodyPr rtlCol="0" anchor="ctr"/>
+          <a:lstStyle/>
+          <a:p>
+            <a:pPr algn="ctr"/>
+            <a:endParaRPr lang="en-US">
+              <a:solidFill>
+                <a:schemeClr val="lt1"/>
+              </a:solidFill>
+              <a:latin typeface="Montserrat" panose="00000500000000000000" pitchFamily="2" charset="0"/>
+            </a:endParaRPr>
+          </a:p>
+        </p:txBody>
+      </p:sp>
+      <p:sp>
+        <p:nvSpPr>
+          <p:cNvPr id="76" name="Text 13">
+            <a:extLst>
+              <a:ext uri="{FF2B5EF4-FFF2-40B4-BE49-F238E27FC236}">
+                <a16:creationId xmlns:a16="http://schemas.microsoft.com/office/drawing/2014/main" id="{F144CB8C-63AF-A2FC-1C66-12DE66352BC4}"/>
+              </a:ext>
+            </a:extLst>
+          </p:cNvPr>
+          <p:cNvSpPr/>
+          <p:nvPr/>
+        </p:nvSpPr>
+        <p:spPr>
+          <a:xfrm>
+            <a:off x="7506008" y="4512568"/>
+            <a:ext cx="1618614" cy="290711"/>
+          </a:xfrm>
+          <a:prstGeom prst="rect">
+            <a:avLst/>
+          </a:prstGeom>
+          <a:noFill/>
+          <a:ln/>
+        </p:spPr>
+        <p:txBody>
+          <a:bodyPr wrap="none" lIns="0" tIns="0" rIns="0" bIns="0" rtlCol="0" anchor="t"/>
+          <a:lstStyle/>
+          <a:p>
+            <a:pPr marL="0" indent="0" algn="ctr">
+              <a:lnSpc>
+                <a:spcPct val="104000"/>
+              </a:lnSpc>
+              <a:buNone/>
+            </a:pPr>
+            <a:r>
+              <a:rPr lang="en-US" sz="1600" b="1" dirty="0">
+                <a:solidFill>
+                  <a:srgbClr val="4C4C4D"/>
+                </a:solidFill>
+                <a:latin typeface="Montserrat" panose="00000500000000000000" pitchFamily="2" charset="0"/>
+              </a:rPr>
+              <a:t>France</a:t>
+            </a:r>
+          </a:p>
+        </p:txBody>
+      </p:sp>
+      <p:sp>
+        <p:nvSpPr>
+          <p:cNvPr id="78" name="Text 14">
+            <a:extLst>
+              <a:ext uri="{FF2B5EF4-FFF2-40B4-BE49-F238E27FC236}">
+                <a16:creationId xmlns:a16="http://schemas.microsoft.com/office/drawing/2014/main" id="{D391ECAB-83D7-3165-6699-9DAE18836246}"/>
+              </a:ext>
+            </a:extLst>
+          </p:cNvPr>
+          <p:cNvSpPr/>
+          <p:nvPr/>
+        </p:nvSpPr>
+        <p:spPr>
+          <a:xfrm>
+            <a:off x="7319978" y="4913114"/>
+            <a:ext cx="1990674" cy="1105495"/>
+          </a:xfrm>
+          <a:prstGeom prst="rect">
+            <a:avLst/>
+          </a:prstGeom>
+          <a:noFill/>
+          <a:ln/>
+        </p:spPr>
+        <p:txBody>
+          <a:bodyPr wrap="square" lIns="0" tIns="0" rIns="0" bIns="0" rtlCol="0" anchor="t"/>
+          <a:lstStyle/>
+          <a:p>
+            <a:pPr marL="0" indent="0" algn="ctr">
+              <a:lnSpc>
+                <a:spcPct val="132000"/>
+              </a:lnSpc>
+              <a:spcAft>
+                <a:spcPts val="850"/>
+              </a:spcAft>
+              <a:buNone/>
+            </a:pPr>
+            <a:r>
+              <a:rPr lang="en-US" sz="1350" b="1" dirty="0">
+                <a:solidFill>
+                  <a:srgbClr val="4C4C4D"/>
+                </a:solidFill>
+                <a:latin typeface="Montserrat" panose="00000500000000000000" pitchFamily="2" charset="0"/>
+                <a:ea typeface="Heebo Bold" pitchFamily="34" charset="-122"/>
+                <a:cs typeface="Heebo Bold" pitchFamily="34" charset="-120"/>
+              </a:rPr>
+              <a:t>109 leads</a:t>
+            </a:r>
+            <a:endParaRPr lang="en-US" sz="1350" dirty="0">
+              <a:latin typeface="Montserrat" panose="00000500000000000000" pitchFamily="2" charset="0"/>
+            </a:endParaRPr>
+          </a:p>
+          <a:p>
+            <a:pPr algn="ctr">
+              <a:lnSpc>
+                <a:spcPct val="132000"/>
+              </a:lnSpc>
+              <a:spcAft>
+                <a:spcPts val="850"/>
+              </a:spcAft>
+            </a:pPr>
+            <a:r>
+              <a:rPr lang="en-US" sz="1500" b="1" dirty="0">
+                <a:solidFill>
+                  <a:srgbClr val="1C6BFF"/>
+                </a:solidFill>
+                <a:latin typeface="Montserrat" panose="00000500000000000000" pitchFamily="2" charset="0"/>
+                <a:cs typeface="Heebo" pitchFamily="34" charset="-120"/>
+              </a:rPr>
+              <a:t>8.5%</a:t>
+            </a:r>
+          </a:p>
+          <a:p>
+            <a:pPr marL="0" indent="0" algn="ctr">
+              <a:lnSpc>
+                <a:spcPct val="132000"/>
+              </a:lnSpc>
+              <a:buNone/>
+            </a:pPr>
+            <a:r>
+              <a:rPr lang="en-US" sz="1350" dirty="0">
+                <a:solidFill>
+                  <a:srgbClr val="4C4C4D"/>
+                </a:solidFill>
+                <a:latin typeface="Montserrat Medium" panose="00000600000000000000" pitchFamily="2" charset="0"/>
+                <a:ea typeface="Heebo" pitchFamily="34" charset="-122"/>
+                <a:cs typeface="Heebo" pitchFamily="34" charset="-120"/>
+              </a:rPr>
+              <a:t>Growth Opportunity</a:t>
+            </a:r>
+            <a:endParaRPr lang="en-US" sz="1350" dirty="0">
+              <a:latin typeface="Montserrat Medium" panose="00000600000000000000" pitchFamily="2" charset="0"/>
+            </a:endParaRPr>
+          </a:p>
+        </p:txBody>
+      </p:sp>
+      <p:sp>
+        <p:nvSpPr>
+          <p:cNvPr id="80" name="Shape 15">
+            <a:extLst>
+              <a:ext uri="{FF2B5EF4-FFF2-40B4-BE49-F238E27FC236}">
+                <a16:creationId xmlns:a16="http://schemas.microsoft.com/office/drawing/2014/main" id="{C3C03FD0-1F8C-AA94-FD3D-61D190AD3C93}"/>
+              </a:ext>
+            </a:extLst>
+          </p:cNvPr>
+          <p:cNvSpPr/>
+          <p:nvPr/>
+        </p:nvSpPr>
+        <p:spPr>
+          <a:xfrm>
+            <a:off x="9539545" y="2423021"/>
+            <a:ext cx="1990576" cy="1878112"/>
+          </a:xfrm>
+          <a:custGeom>
+            <a:avLst/>
+            <a:gdLst/>
+            <a:ahLst/>
+            <a:cxnLst/>
+            <a:rect l="l" t="t" r="r" b="b"/>
+            <a:pathLst>
+              <a:path w="1990576" h="1878112">
+                <a:moveTo>
+                  <a:pt x="23258" y="0"/>
+                </a:moveTo>
+                <a:lnTo>
+                  <a:pt x="1967318" y="0"/>
+                </a:lnTo>
+                <a:arcTo wR="23258" hR="23259" stAng="16200000" swAng="5400000"/>
+                <a:lnTo>
+                  <a:pt x="1990576" y="1878112"/>
+                </a:lnTo>
+                <a:lnTo>
+                  <a:pt x="0" y="1878112"/>
+                </a:lnTo>
+                <a:lnTo>
+                  <a:pt x="0" y="23259"/>
+                </a:lnTo>
+                <a:arcTo wR="23258" hR="23259" stAng="10800000" swAng="5400000"/>
+                <a:close/>
+              </a:path>
+            </a:pathLst>
+          </a:custGeom>
+          <a:solidFill>
+            <a:srgbClr val="F3F4F9"/>
+          </a:solidFill>
+          <a:ln>
+            <a:noFill/>
+          </a:ln>
+          <a:effectLst>
+            <a:outerShdw blurRad="63500" sx="102000" sy="102000" algn="ctr" rotWithShape="0">
+              <a:prstClr val="black">
+                <a:alpha val="40000"/>
+              </a:prstClr>
+            </a:outerShdw>
+          </a:effectLst>
+        </p:spPr>
+        <p:style>
+          <a:lnRef idx="1">
+            <a:schemeClr val="accent1"/>
+          </a:lnRef>
+          <a:fillRef idx="3">
+            <a:schemeClr val="accent1"/>
+          </a:fillRef>
+          <a:effectRef idx="2">
+            <a:schemeClr val="accent1"/>
+          </a:effectRef>
+          <a:fontRef idx="minor">
+            <a:schemeClr val="lt1"/>
+          </a:fontRef>
+        </p:style>
+        <p:txBody>
+          <a:bodyPr rtlCol="0" anchor="ctr"/>
+          <a:lstStyle/>
+          <a:p>
+            <a:pPr algn="ctr"/>
+            <a:endParaRPr lang="en-US">
+              <a:solidFill>
+                <a:schemeClr val="lt1"/>
+              </a:solidFill>
+              <a:latin typeface="Montserrat" panose="00000500000000000000" pitchFamily="2" charset="0"/>
+            </a:endParaRPr>
+          </a:p>
+        </p:txBody>
+      </p:sp>
+      <p:sp>
+        <p:nvSpPr>
+          <p:cNvPr id="82" name="Text 16">
+            <a:extLst>
+              <a:ext uri="{FF2B5EF4-FFF2-40B4-BE49-F238E27FC236}">
+                <a16:creationId xmlns:a16="http://schemas.microsoft.com/office/drawing/2014/main" id="{20830D47-3D85-D6F2-C9AC-93FF0E72FCE5}"/>
+              </a:ext>
+            </a:extLst>
+          </p:cNvPr>
+          <p:cNvSpPr/>
+          <p:nvPr/>
+        </p:nvSpPr>
+        <p:spPr>
+          <a:xfrm>
+            <a:off x="9725575" y="2609056"/>
+            <a:ext cx="1618515" cy="290711"/>
+          </a:xfrm>
+          <a:prstGeom prst="rect">
+            <a:avLst/>
+          </a:prstGeom>
+          <a:noFill/>
+          <a:ln/>
+        </p:spPr>
+        <p:txBody>
+          <a:bodyPr wrap="none" lIns="0" tIns="0" rIns="0" bIns="0" rtlCol="0" anchor="t"/>
+          <a:lstStyle/>
+          <a:p>
+            <a:pPr marL="0" indent="0" algn="ctr">
+              <a:lnSpc>
+                <a:spcPct val="104000"/>
+              </a:lnSpc>
+              <a:buNone/>
+            </a:pPr>
+            <a:r>
+              <a:rPr lang="en-US" sz="1600" b="1" dirty="0">
+                <a:solidFill>
+                  <a:srgbClr val="4C4C4D"/>
+                </a:solidFill>
+                <a:latin typeface="Montserrat" panose="00000500000000000000" pitchFamily="2" charset="0"/>
+              </a:rPr>
+              <a:t>Italy</a:t>
+            </a:r>
+          </a:p>
+        </p:txBody>
+      </p:sp>
+      <p:sp>
+        <p:nvSpPr>
+          <p:cNvPr id="84" name="Text 17">
+            <a:extLst>
+              <a:ext uri="{FF2B5EF4-FFF2-40B4-BE49-F238E27FC236}">
+                <a16:creationId xmlns:a16="http://schemas.microsoft.com/office/drawing/2014/main" id="{06B01C54-08B6-92A3-2D9F-0231F80B36ED}"/>
+              </a:ext>
+            </a:extLst>
+          </p:cNvPr>
+          <p:cNvSpPr/>
+          <p:nvPr/>
+        </p:nvSpPr>
+        <p:spPr>
+          <a:xfrm>
+            <a:off x="9725575" y="3009602"/>
+            <a:ext cx="1618515" cy="1105495"/>
+          </a:xfrm>
+          <a:prstGeom prst="rect">
+            <a:avLst/>
+          </a:prstGeom>
+          <a:noFill/>
+          <a:ln/>
+        </p:spPr>
+        <p:txBody>
+          <a:bodyPr wrap="square" lIns="0" tIns="0" rIns="0" bIns="0" rtlCol="0" anchor="t"/>
+          <a:lstStyle/>
+          <a:p>
+            <a:pPr marL="0" indent="0" algn="ctr">
+              <a:lnSpc>
+                <a:spcPct val="132000"/>
+              </a:lnSpc>
+              <a:spcAft>
+                <a:spcPts val="850"/>
+              </a:spcAft>
+              <a:buNone/>
+            </a:pPr>
+            <a:r>
+              <a:rPr lang="en-US" sz="1350" b="1" dirty="0">
+                <a:solidFill>
+                  <a:srgbClr val="4C4C4D"/>
+                </a:solidFill>
+                <a:latin typeface="Montserrat" panose="00000500000000000000" pitchFamily="2" charset="0"/>
+                <a:ea typeface="Heebo Bold" pitchFamily="34" charset="-122"/>
+                <a:cs typeface="Heebo Bold" pitchFamily="34" charset="-120"/>
+              </a:rPr>
+              <a:t>36 leads</a:t>
+            </a:r>
+            <a:endParaRPr lang="en-US" sz="1350" dirty="0">
+              <a:latin typeface="Montserrat" panose="00000500000000000000" pitchFamily="2" charset="0"/>
+            </a:endParaRPr>
+          </a:p>
+          <a:p>
+            <a:pPr algn="ctr">
+              <a:lnSpc>
+                <a:spcPct val="132000"/>
+              </a:lnSpc>
+              <a:spcAft>
+                <a:spcPts val="850"/>
+              </a:spcAft>
+            </a:pPr>
+            <a:r>
+              <a:rPr lang="en-US" sz="1500" b="1" dirty="0">
+                <a:solidFill>
+                  <a:srgbClr val="1C6BFF"/>
+                </a:solidFill>
+                <a:latin typeface="Montserrat" panose="00000500000000000000" pitchFamily="2" charset="0"/>
+                <a:cs typeface="Heebo" pitchFamily="34" charset="-120"/>
+              </a:rPr>
+              <a:t>2.8%</a:t>
+            </a:r>
+          </a:p>
+          <a:p>
+            <a:pPr marL="0" indent="0" algn="ctr">
+              <a:lnSpc>
+                <a:spcPct val="132000"/>
+              </a:lnSpc>
+              <a:buNone/>
+            </a:pPr>
+            <a:r>
+              <a:rPr lang="en-US" sz="1350" dirty="0">
+                <a:solidFill>
+                  <a:srgbClr val="4C4C4D"/>
+                </a:solidFill>
+                <a:latin typeface="Montserrat Medium" panose="00000600000000000000" pitchFamily="2" charset="0"/>
+                <a:ea typeface="Heebo" pitchFamily="34" charset="-122"/>
+                <a:cs typeface="Heebo" pitchFamily="34" charset="-120"/>
+              </a:rPr>
+              <a:t>Early Stage</a:t>
+            </a:r>
+            <a:endParaRPr lang="en-US" sz="1350" dirty="0">
+              <a:latin typeface="Montserrat Medium" panose="00000600000000000000" pitchFamily="2" charset="0"/>
+            </a:endParaRPr>
+          </a:p>
+        </p:txBody>
+      </p:sp>
+      <p:sp>
+        <p:nvSpPr>
+          <p:cNvPr id="86" name="TITLE_BuyingStage">
+            <a:extLst>
+              <a:ext uri="{FF2B5EF4-FFF2-40B4-BE49-F238E27FC236}">
+                <a16:creationId xmlns:a16="http://schemas.microsoft.com/office/drawing/2014/main" id="{132FE055-1F7B-4D42-8FD5-ED7419111692}"/>
+              </a:ext>
+            </a:extLst>
+          </p:cNvPr>
+          <p:cNvSpPr txBox="1">
+            <a:spLocks/>
+          </p:cNvSpPr>
+          <p:nvPr/>
+        </p:nvSpPr>
+        <p:spPr>
+          <a:xfrm>
+            <a:off x="640080" y="-45403"/>
+            <a:ext cx="10515600" cy="1325563"/>
+          </a:xfrm>
+          <a:prstGeom prst="rect">
+            <a:avLst/>
+          </a:prstGeom>
+        </p:spPr>
+        <p:txBody>
+          <a:bodyPr vert="horz" wrap="square" lIns="91440" tIns="45720" rIns="91440" bIns="45720" rtlCol="0" anchor="ctr">
+            <a:normAutofit/>
+          </a:bodyPr>
+          <a:lstStyle>
+            <a:lvl1pPr algn="l" defTabSz="914400" rtl="0" eaLnBrk="1" latinLnBrk="0" hangingPunct="1">
+              <a:lnSpc>
+                <a:spcPct val="90000"/>
+              </a:lnSpc>
+              <a:spcBef>
+                <a:spcPct val="0"/>
+              </a:spcBef>
+              <a:buNone/>
+              <a:defRPr sz="4400" b="1" kern="1200">
+                <a:solidFill>
+                  <a:schemeClr val="tx1"/>
+                </a:solidFill>
+                <a:latin typeface="+mn-lt"/>
+                <a:ea typeface="+mj-ea"/>
+                <a:cs typeface="+mj-cs"/>
+              </a:defRPr>
+            </a:lvl1pPr>
+          </a:lstStyle>
+          <a:p>
+            <a:r>
+              <a:rPr lang="en-US" sz="3200" dirty="0">
+                <a:solidFill>
+                  <a:schemeClr val="accent1"/>
+                </a:solidFill>
+                <a:latin typeface="Montserrat" panose="00000500000000000000" pitchFamily="2" charset="0"/>
+              </a:rPr>
+              <a:t>Market Dominance &amp; Growth Potential</a:t>
+            </a:r>
+          </a:p>
+        </p:txBody>
+      </p:sp>
+    </p:spTree>
+    <p:extLst>
+      <p:ext uri="{BB962C8B-B14F-4D97-AF65-F5344CB8AC3E}">
+        <p14:creationId xmlns:p14="http://schemas.microsoft.com/office/powerpoint/2010/main" val="1098936745"/>
+      </p:ext>
+    </p:extLst>
+  </p:cSld>
+  <p:clrMapOvr>
+    <a:masterClrMapping/>
+  </p:clrMapOvr>
+</p:sld>
+</file>
+
+<file path=ppt/slides/slide24.xml><?xml version="1.0" encoding="utf-8"?>
+<p:sld xmlns:a="http://schemas.openxmlformats.org/drawingml/2006/main" xmlns:r="http://schemas.openxmlformats.org/officeDocument/2006/relationships" xmlns:p="http://schemas.openxmlformats.org/presentationml/2006/main">
+  <p:cSld>
+    <p:spTree>
+      <p:nvGrpSpPr>
+        <p:cNvPr id="1" name="">
+          <a:extLst>
+            <a:ext uri="{FF2B5EF4-FFF2-40B4-BE49-F238E27FC236}">
+              <a16:creationId xmlns:a16="http://schemas.microsoft.com/office/drawing/2014/main" id="{9B79B91D-5F37-06C1-2153-363AD9774450}"/>
+            </a:ext>
+          </a:extLst>
+        </p:cNvPr>
+        <p:cNvGrpSpPr/>
+        <p:nvPr/>
+      </p:nvGrpSpPr>
+      <p:grpSpPr>
+        <a:xfrm>
+          <a:off x="0" y="0"/>
+          <a:ext cx="0" cy="0"/>
+          <a:chOff x="0" y="0"/>
+          <a:chExt cx="0" cy="0"/>
+        </a:xfrm>
+      </p:grpSpPr>
+      <p:sp>
+        <p:nvSpPr>
+          <p:cNvPr id="3" name="PERIOD_Q2">
+            <a:extLst>
+              <a:ext uri="{FF2B5EF4-FFF2-40B4-BE49-F238E27FC236}">
+                <a16:creationId xmlns:a16="http://schemas.microsoft.com/office/drawing/2014/main" id="{83A7B33D-9936-D74B-19D7-7579763D7BDD}"/>
+              </a:ext>
+            </a:extLst>
+          </p:cNvPr>
+          <p:cNvSpPr>
+            <a:spLocks noGrp="1"/>
+          </p:cNvSpPr>
+          <p:nvPr>
+            <p:ph type="body" sz="quarter" idx="10"/>
+          </p:nvPr>
+        </p:nvSpPr>
+        <p:spPr>
+          <a:xfrm>
+            <a:off x="716737" y="1427004"/>
+            <a:ext cx="10515600" cy="590550"/>
+          </a:xfrm>
+        </p:spPr>
+        <p:txBody>
+          <a:bodyPr wrap="square"/>
+          <a:lstStyle/>
+          <a:p>
+            <a:pPr algn="l"/>
+            <a:r>
+              <a:rPr sz="1500" b="0" i="0" dirty="0">
+                <a:solidFill>
+                  <a:srgbClr val="555B6E"/>
+                </a:solidFill>
+                <a:latin typeface="Montserrat" panose="00000500000000000000" pitchFamily="2" charset="0"/>
+              </a:rPr>
+              <a:t>Jan 10 – Mar 31, 2026</a:t>
+            </a:r>
+          </a:p>
+        </p:txBody>
+      </p:sp>
+      <p:grpSp>
+        <p:nvGrpSpPr>
+          <p:cNvPr id="2" name="Group 1">
+            <a:extLst>
+              <a:ext uri="{FF2B5EF4-FFF2-40B4-BE49-F238E27FC236}">
+                <a16:creationId xmlns:a16="http://schemas.microsoft.com/office/drawing/2014/main" id="{406F3F5D-BC1E-F169-1031-8AB68AF810FE}"/>
+              </a:ext>
+            </a:extLst>
+          </p:cNvPr>
+          <p:cNvGrpSpPr/>
+          <p:nvPr/>
+        </p:nvGrpSpPr>
+        <p:grpSpPr>
+          <a:xfrm>
+            <a:off x="2155068" y="4405474"/>
+            <a:ext cx="7638938" cy="1130546"/>
+            <a:chOff x="845864" y="3607788"/>
+            <a:chExt cx="7638938" cy="1417320"/>
+          </a:xfrm>
+        </p:grpSpPr>
+        <p:sp>
+          <p:nvSpPr>
+            <p:cNvPr id="14" name="Rounded Rectangle 13">
+              <a:extLst>
+                <a:ext uri="{FF2B5EF4-FFF2-40B4-BE49-F238E27FC236}">
+                  <a16:creationId xmlns:a16="http://schemas.microsoft.com/office/drawing/2014/main" id="{ACA6B6B7-45B3-CEE1-4E70-D868F1544A90}"/>
+                </a:ext>
+              </a:extLst>
+            </p:cNvPr>
+            <p:cNvSpPr/>
+            <p:nvPr/>
+          </p:nvSpPr>
+          <p:spPr>
+            <a:xfrm>
+              <a:off x="845864" y="3607788"/>
+              <a:ext cx="7475176" cy="1417320"/>
+            </a:xfrm>
+            <a:prstGeom prst="roundRect">
+              <a:avLst>
+                <a:gd name="adj" fmla="val 6000"/>
+              </a:avLst>
+            </a:prstGeom>
+            <a:solidFill>
+              <a:srgbClr val="F3F4F9"/>
+            </a:solidFill>
+            <a:ln>
+              <a:noFill/>
+            </a:ln>
+            <a:effectLst>
+              <a:outerShdw blurRad="63500" sx="102000" sy="102000" algn="ctr" rotWithShape="0">
+                <a:prstClr val="black">
+                  <a:alpha val="40000"/>
+                </a:prstClr>
+              </a:outerShdw>
+            </a:effectLst>
+          </p:spPr>
+          <p:style>
+            <a:lnRef idx="1">
+              <a:schemeClr val="accent1"/>
+            </a:lnRef>
+            <a:fillRef idx="3">
+              <a:schemeClr val="accent1"/>
+            </a:fillRef>
+            <a:effectRef idx="2">
+              <a:schemeClr val="accent1"/>
+            </a:effectRef>
+            <a:fontRef idx="minor">
+              <a:schemeClr val="lt1"/>
+            </a:fontRef>
+          </p:style>
+          <p:txBody>
+            <a:bodyPr rtlCol="0" anchor="ctr"/>
+            <a:lstStyle/>
+            <a:p>
+              <a:pPr algn="ctr"/>
+              <a:endParaRPr>
+                <a:latin typeface="Montserrat" panose="00000500000000000000" pitchFamily="2" charset="0"/>
+              </a:endParaRPr>
+            </a:p>
+          </p:txBody>
+        </p:sp>
+        <p:sp>
+          <p:nvSpPr>
+            <p:cNvPr id="15" name="AI_Q2_TopAsset">
+              <a:extLst>
+                <a:ext uri="{FF2B5EF4-FFF2-40B4-BE49-F238E27FC236}">
+                  <a16:creationId xmlns:a16="http://schemas.microsoft.com/office/drawing/2014/main" id="{0BAB2F00-D7FD-9BE9-3556-E99AD9EB4D3E}"/>
+                </a:ext>
+              </a:extLst>
+            </p:cNvPr>
+            <p:cNvSpPr txBox="1"/>
+            <p:nvPr/>
+          </p:nvSpPr>
+          <p:spPr>
+            <a:xfrm>
+              <a:off x="1283946" y="4040486"/>
+              <a:ext cx="7200856" cy="551922"/>
+            </a:xfrm>
+            <a:prstGeom prst="rect">
+              <a:avLst/>
+            </a:prstGeom>
+            <a:noFill/>
+          </p:spPr>
+          <p:txBody>
+            <a:bodyPr wrap="square" lIns="0" tIns="0" rIns="0" bIns="0" anchor="t">
+              <a:spAutoFit/>
+            </a:bodyPr>
+            <a:lstStyle/>
+            <a:p>
+              <a:pPr>
+                <a:lnSpc>
+                  <a:spcPct val="105000"/>
+                </a:lnSpc>
+              </a:pPr>
+              <a:r>
+                <a:rPr lang="en-US" sz="1400" dirty="0">
+                  <a:solidFill>
+                    <a:srgbClr val="0E2841"/>
+                  </a:solidFill>
+                  <a:latin typeface="Montserrat Medium" panose="00000600000000000000" pitchFamily="2" charset="0"/>
+                </a:rPr>
+                <a:t>UK and Germany dominate with </a:t>
+              </a:r>
+              <a:r>
+                <a:rPr lang="en-US" sz="1400" b="1" dirty="0">
+                  <a:solidFill>
+                    <a:srgbClr val="1C6BFF"/>
+                  </a:solidFill>
+                  <a:latin typeface="Montserrat" panose="00000500000000000000" pitchFamily="2" charset="0"/>
+                </a:rPr>
+                <a:t>82.5%</a:t>
+              </a:r>
+              <a:r>
+                <a:rPr lang="en-US" sz="1400" dirty="0">
+                  <a:solidFill>
+                    <a:srgbClr val="0E2841"/>
+                  </a:solidFill>
+                  <a:latin typeface="Montserrat Medium" panose="00000600000000000000" pitchFamily="2" charset="0"/>
+                </a:rPr>
+                <a:t> of leads, leaving 24.7% untapped opportunity in Spain, France, and Italy - three markets ripe for expansion.</a:t>
+              </a:r>
+              <a:endParaRPr lang="en-US" sz="1400" i="0" dirty="0">
+                <a:solidFill>
+                  <a:srgbClr val="0E2841"/>
+                </a:solidFill>
+                <a:latin typeface="Montserrat Medium" panose="00000600000000000000" pitchFamily="2" charset="0"/>
+              </a:endParaRPr>
+            </a:p>
+          </p:txBody>
+        </p:sp>
+      </p:grpSp>
+      <p:grpSp>
+        <p:nvGrpSpPr>
+          <p:cNvPr id="26" name="CARD_Q2_TotalLeads">
+            <a:extLst>
+              <a:ext uri="{FF2B5EF4-FFF2-40B4-BE49-F238E27FC236}">
+                <a16:creationId xmlns:a16="http://schemas.microsoft.com/office/drawing/2014/main" id="{C31633AE-38A2-48C8-8B7A-37400C3A2E13}"/>
+              </a:ext>
+            </a:extLst>
+          </p:cNvPr>
+          <p:cNvGrpSpPr/>
+          <p:nvPr/>
+        </p:nvGrpSpPr>
+        <p:grpSpPr>
+          <a:xfrm>
+            <a:off x="716737" y="2453011"/>
+            <a:ext cx="1913990" cy="1130546"/>
+            <a:chOff x="847497" y="2506662"/>
+            <a:chExt cx="1913990" cy="1130546"/>
+          </a:xfrm>
+        </p:grpSpPr>
+        <p:sp>
+          <p:nvSpPr>
+            <p:cNvPr id="22" name="Rectangle: Rounded Corners 21">
+              <a:extLst>
+                <a:ext uri="{FF2B5EF4-FFF2-40B4-BE49-F238E27FC236}">
+                  <a16:creationId xmlns:a16="http://schemas.microsoft.com/office/drawing/2014/main" id="{B492677F-7C6F-913D-3909-BF7AD6B28EC4}"/>
+                </a:ext>
+              </a:extLst>
+            </p:cNvPr>
+            <p:cNvSpPr/>
+            <p:nvPr/>
+          </p:nvSpPr>
+          <p:spPr>
+            <a:xfrm>
+              <a:off x="847497" y="2506662"/>
+              <a:ext cx="1913990" cy="1130546"/>
+            </a:xfrm>
+            <a:prstGeom prst="roundRect">
+              <a:avLst/>
+            </a:prstGeom>
+            <a:solidFill>
+              <a:schemeClr val="bg1"/>
+            </a:solidFill>
+            <a:ln>
+              <a:noFill/>
+            </a:ln>
+            <a:effectLst>
+              <a:outerShdw blurRad="63500" sx="102000" sy="102000" algn="ctr" rotWithShape="0">
+                <a:prstClr val="black">
+                  <a:alpha val="40000"/>
+                </a:prstClr>
+              </a:outerShdw>
+            </a:effectLst>
+          </p:spPr>
+          <p:style>
+            <a:lnRef idx="2">
+              <a:schemeClr val="accent1">
+                <a:shade val="15000"/>
+              </a:schemeClr>
+            </a:lnRef>
+            <a:fillRef idx="1">
+              <a:schemeClr val="accent1"/>
+            </a:fillRef>
+            <a:effectRef idx="0">
+              <a:schemeClr val="accent1"/>
+            </a:effectRef>
+            <a:fontRef idx="minor">
+              <a:schemeClr val="lt1"/>
+            </a:fontRef>
+          </p:style>
+          <p:txBody>
+            <a:bodyPr rtlCol="0" anchor="ctr"/>
+            <a:lstStyle/>
+            <a:p>
+              <a:pPr algn="ctr"/>
+              <a:endParaRPr lang="en-US">
+                <a:latin typeface="Montserrat" panose="00000500000000000000" pitchFamily="2" charset="0"/>
+              </a:endParaRPr>
+            </a:p>
+          </p:txBody>
+        </p:sp>
+        <p:sp>
+          <p:nvSpPr>
+            <p:cNvPr id="23" name="TextBox 22">
+              <a:extLst>
+                <a:ext uri="{FF2B5EF4-FFF2-40B4-BE49-F238E27FC236}">
+                  <a16:creationId xmlns:a16="http://schemas.microsoft.com/office/drawing/2014/main" id="{A7E5EDF6-FCAA-3FC0-15B6-970E9228709B}"/>
+                </a:ext>
+              </a:extLst>
+            </p:cNvPr>
+            <p:cNvSpPr txBox="1"/>
+            <p:nvPr/>
+          </p:nvSpPr>
+          <p:spPr>
+            <a:xfrm>
+              <a:off x="1218783" y="2642001"/>
+              <a:ext cx="1352584" cy="523220"/>
+            </a:xfrm>
+            <a:prstGeom prst="rect">
+              <a:avLst/>
+            </a:prstGeom>
+            <a:noFill/>
+          </p:spPr>
+          <p:txBody>
+            <a:bodyPr wrap="square" rtlCol="0">
+              <a:spAutoFit/>
+            </a:bodyPr>
+            <a:lstStyle/>
+            <a:p>
+              <a:r>
+                <a:rPr lang="en-US" sz="2800" b="1" dirty="0">
+                  <a:solidFill>
+                    <a:srgbClr val="0F3D63"/>
+                  </a:solidFill>
+                  <a:latin typeface="Montserrat" panose="00000500000000000000" pitchFamily="2" charset="0"/>
+                </a:rPr>
+                <a:t>1,372</a:t>
+              </a:r>
+            </a:p>
+          </p:txBody>
+        </p:sp>
+        <p:sp>
+          <p:nvSpPr>
+            <p:cNvPr id="24" name="TextBox 23">
+              <a:extLst>
+                <a:ext uri="{FF2B5EF4-FFF2-40B4-BE49-F238E27FC236}">
+                  <a16:creationId xmlns:a16="http://schemas.microsoft.com/office/drawing/2014/main" id="{0A4985B4-6E79-40CE-6EFE-2616E8819BAE}"/>
+                </a:ext>
+              </a:extLst>
+            </p:cNvPr>
+            <p:cNvSpPr txBox="1"/>
+            <p:nvPr/>
+          </p:nvSpPr>
+          <p:spPr>
+            <a:xfrm>
+              <a:off x="914400" y="3090393"/>
+              <a:ext cx="1801242" cy="523220"/>
+            </a:xfrm>
+            <a:prstGeom prst="rect">
+              <a:avLst/>
+            </a:prstGeom>
+            <a:noFill/>
+          </p:spPr>
+          <p:txBody>
+            <a:bodyPr wrap="square" rtlCol="0">
+              <a:spAutoFit/>
+            </a:bodyPr>
+            <a:lstStyle/>
+            <a:p>
+              <a:pPr algn="ctr"/>
+              <a:r>
+                <a:rPr lang="en-US" sz="1400" dirty="0">
+                  <a:solidFill>
+                    <a:schemeClr val="bg1">
+                      <a:lumMod val="50000"/>
+                    </a:schemeClr>
+                  </a:solidFill>
+                  <a:latin typeface="Montserrat" panose="00000500000000000000" pitchFamily="2" charset="0"/>
+                </a:rPr>
+                <a:t>Total Leads across 5 markets</a:t>
+              </a:r>
+            </a:p>
+          </p:txBody>
+        </p:sp>
+      </p:grpSp>
+      <p:grpSp>
+        <p:nvGrpSpPr>
+          <p:cNvPr id="27" name="CARD_Q2_Accounts">
+            <a:extLst>
+              <a:ext uri="{FF2B5EF4-FFF2-40B4-BE49-F238E27FC236}">
+                <a16:creationId xmlns:a16="http://schemas.microsoft.com/office/drawing/2014/main" id="{B2F38224-99B1-6816-8806-417A14F8ABBB}"/>
+              </a:ext>
+            </a:extLst>
+          </p:cNvPr>
+          <p:cNvGrpSpPr/>
+          <p:nvPr/>
+        </p:nvGrpSpPr>
+        <p:grpSpPr>
+          <a:xfrm>
+            <a:off x="2917241" y="2453011"/>
+            <a:ext cx="1913990" cy="1130546"/>
+            <a:chOff x="847497" y="2506662"/>
+            <a:chExt cx="1913990" cy="1130546"/>
+          </a:xfrm>
+        </p:grpSpPr>
+        <p:sp>
+          <p:nvSpPr>
+            <p:cNvPr id="28" name="Rectangle: Rounded Corners 27">
+              <a:extLst>
+                <a:ext uri="{FF2B5EF4-FFF2-40B4-BE49-F238E27FC236}">
+                  <a16:creationId xmlns:a16="http://schemas.microsoft.com/office/drawing/2014/main" id="{449CBB97-18BB-2CEB-F1A7-0C63691D7D86}"/>
+                </a:ext>
+              </a:extLst>
+            </p:cNvPr>
+            <p:cNvSpPr/>
+            <p:nvPr/>
+          </p:nvSpPr>
+          <p:spPr>
+            <a:xfrm>
+              <a:off x="847497" y="2506662"/>
+              <a:ext cx="1913990" cy="1130546"/>
+            </a:xfrm>
+            <a:prstGeom prst="roundRect">
+              <a:avLst/>
+            </a:prstGeom>
+            <a:solidFill>
+              <a:schemeClr val="bg1"/>
+            </a:solidFill>
+            <a:ln>
+              <a:noFill/>
+            </a:ln>
+            <a:effectLst>
+              <a:outerShdw blurRad="63500" sx="102000" sy="102000" algn="ctr" rotWithShape="0">
+                <a:prstClr val="black">
+                  <a:alpha val="40000"/>
+                </a:prstClr>
+              </a:outerShdw>
+            </a:effectLst>
+          </p:spPr>
+          <p:style>
+            <a:lnRef idx="2">
+              <a:schemeClr val="accent1">
+                <a:shade val="15000"/>
+              </a:schemeClr>
+            </a:lnRef>
+            <a:fillRef idx="1">
+              <a:schemeClr val="accent1"/>
+            </a:fillRef>
+            <a:effectRef idx="0">
+              <a:schemeClr val="accent1"/>
+            </a:effectRef>
+            <a:fontRef idx="minor">
+              <a:schemeClr val="lt1"/>
+            </a:fontRef>
+          </p:style>
+          <p:txBody>
+            <a:bodyPr rtlCol="0" anchor="ctr"/>
+            <a:lstStyle/>
+            <a:p>
+              <a:pPr algn="ctr"/>
+              <a:endParaRPr lang="en-US">
+                <a:latin typeface="Montserrat" panose="00000500000000000000" pitchFamily="2" charset="0"/>
+              </a:endParaRPr>
+            </a:p>
+          </p:txBody>
+        </p:sp>
+        <p:sp>
+          <p:nvSpPr>
+            <p:cNvPr id="29" name="TextBox 28">
+              <a:extLst>
+                <a:ext uri="{FF2B5EF4-FFF2-40B4-BE49-F238E27FC236}">
+                  <a16:creationId xmlns:a16="http://schemas.microsoft.com/office/drawing/2014/main" id="{4DEF2741-0B3D-CB80-514E-F9815071F995}"/>
+                </a:ext>
+              </a:extLst>
+            </p:cNvPr>
+            <p:cNvSpPr txBox="1"/>
+            <p:nvPr/>
+          </p:nvSpPr>
+          <p:spPr>
+            <a:xfrm>
+              <a:off x="1614884" y="2642001"/>
+              <a:ext cx="467447" cy="523220"/>
+            </a:xfrm>
+            <a:prstGeom prst="rect">
+              <a:avLst/>
+            </a:prstGeom>
+            <a:noFill/>
+          </p:spPr>
+          <p:txBody>
+            <a:bodyPr wrap="square" rtlCol="0">
+              <a:spAutoFit/>
+            </a:bodyPr>
+            <a:lstStyle/>
+            <a:p>
+              <a:r>
+                <a:rPr lang="en-US" sz="2800" b="1" dirty="0">
+                  <a:solidFill>
+                    <a:srgbClr val="0F3D63"/>
+                  </a:solidFill>
+                  <a:latin typeface="Montserrat" panose="00000500000000000000" pitchFamily="2" charset="0"/>
+                </a:rPr>
+                <a:t>5</a:t>
+              </a:r>
+            </a:p>
+          </p:txBody>
+        </p:sp>
+        <p:sp>
+          <p:nvSpPr>
+            <p:cNvPr id="30" name="TextBox 29">
+              <a:extLst>
+                <a:ext uri="{FF2B5EF4-FFF2-40B4-BE49-F238E27FC236}">
+                  <a16:creationId xmlns:a16="http://schemas.microsoft.com/office/drawing/2014/main" id="{B916B642-9EF2-569C-5509-E8F6C63035C8}"/>
+                </a:ext>
+              </a:extLst>
+            </p:cNvPr>
+            <p:cNvSpPr txBox="1"/>
+            <p:nvPr/>
+          </p:nvSpPr>
+          <p:spPr>
+            <a:xfrm>
+              <a:off x="995666" y="3172889"/>
+              <a:ext cx="1709046" cy="307777"/>
+            </a:xfrm>
+            <a:prstGeom prst="rect">
+              <a:avLst/>
+            </a:prstGeom>
+            <a:noFill/>
+          </p:spPr>
+          <p:txBody>
+            <a:bodyPr wrap="square" rtlCol="0">
+              <a:spAutoFit/>
+            </a:bodyPr>
+            <a:lstStyle>
+              <a:defPPr>
+                <a:defRPr lang="en-US"/>
+              </a:defPPr>
+              <a:lvl1pPr algn="ctr">
+                <a:defRPr sz="1400">
+                  <a:solidFill>
+                    <a:schemeClr val="bg1">
+                      <a:lumMod val="50000"/>
+                    </a:schemeClr>
+                  </a:solidFill>
+                  <a:latin typeface="Montserrat" panose="00000500000000000000" pitchFamily="2" charset="0"/>
+                </a:defRPr>
+              </a:lvl1pPr>
+            </a:lstStyle>
+            <a:p>
+              <a:r>
+                <a:rPr lang="en-US" dirty="0"/>
+                <a:t>Markets Tracked</a:t>
+              </a:r>
+            </a:p>
+          </p:txBody>
+        </p:sp>
+      </p:grpSp>
+      <p:grpSp>
+        <p:nvGrpSpPr>
+          <p:cNvPr id="31" name="CARD_Q2_Assets">
+            <a:extLst>
+              <a:ext uri="{FF2B5EF4-FFF2-40B4-BE49-F238E27FC236}">
+                <a16:creationId xmlns:a16="http://schemas.microsoft.com/office/drawing/2014/main" id="{F58EC0F0-5654-0DC1-BC3F-89E12F776082}"/>
+              </a:ext>
+            </a:extLst>
+          </p:cNvPr>
+          <p:cNvGrpSpPr/>
+          <p:nvPr/>
+        </p:nvGrpSpPr>
+        <p:grpSpPr>
+          <a:xfrm>
+            <a:off x="5120945" y="2452526"/>
+            <a:ext cx="1993082" cy="1130546"/>
+            <a:chOff x="847497" y="2506662"/>
+            <a:chExt cx="1993082" cy="1130546"/>
+          </a:xfrm>
+        </p:grpSpPr>
+        <p:sp>
+          <p:nvSpPr>
+            <p:cNvPr id="32" name="Rectangle: Rounded Corners 31">
+              <a:extLst>
+                <a:ext uri="{FF2B5EF4-FFF2-40B4-BE49-F238E27FC236}">
+                  <a16:creationId xmlns:a16="http://schemas.microsoft.com/office/drawing/2014/main" id="{CF83C5E9-B6FC-F4D4-3549-2421BD40C1DB}"/>
+                </a:ext>
+              </a:extLst>
+            </p:cNvPr>
+            <p:cNvSpPr/>
+            <p:nvPr/>
+          </p:nvSpPr>
+          <p:spPr>
+            <a:xfrm>
+              <a:off x="847497" y="2506662"/>
+              <a:ext cx="1913990" cy="1130546"/>
+            </a:xfrm>
+            <a:prstGeom prst="roundRect">
+              <a:avLst/>
+            </a:prstGeom>
+            <a:solidFill>
+              <a:schemeClr val="bg1"/>
+            </a:solidFill>
+            <a:ln>
+              <a:noFill/>
+            </a:ln>
+            <a:effectLst>
+              <a:outerShdw blurRad="63500" sx="102000" sy="102000" algn="ctr" rotWithShape="0">
+                <a:prstClr val="black">
+                  <a:alpha val="40000"/>
+                </a:prstClr>
+              </a:outerShdw>
+            </a:effectLst>
+          </p:spPr>
+          <p:style>
+            <a:lnRef idx="2">
+              <a:schemeClr val="accent1">
+                <a:shade val="15000"/>
+              </a:schemeClr>
+            </a:lnRef>
+            <a:fillRef idx="1">
+              <a:schemeClr val="accent1"/>
+            </a:fillRef>
+            <a:effectRef idx="0">
+              <a:schemeClr val="accent1"/>
+            </a:effectRef>
+            <a:fontRef idx="minor">
+              <a:schemeClr val="lt1"/>
+            </a:fontRef>
+          </p:style>
+          <p:txBody>
+            <a:bodyPr rtlCol="0" anchor="ctr"/>
+            <a:lstStyle/>
+            <a:p>
+              <a:pPr algn="ctr"/>
+              <a:endParaRPr lang="en-US">
+                <a:latin typeface="Montserrat" panose="00000500000000000000" pitchFamily="2" charset="0"/>
+              </a:endParaRPr>
+            </a:p>
+          </p:txBody>
+        </p:sp>
+        <p:sp>
+          <p:nvSpPr>
+            <p:cNvPr id="33" name="TextBox 32">
+              <a:extLst>
+                <a:ext uri="{FF2B5EF4-FFF2-40B4-BE49-F238E27FC236}">
+                  <a16:creationId xmlns:a16="http://schemas.microsoft.com/office/drawing/2014/main" id="{DF342BC5-2527-62B4-BE19-BE97596E3E19}"/>
+                </a:ext>
+              </a:extLst>
+            </p:cNvPr>
+            <p:cNvSpPr txBox="1"/>
+            <p:nvPr/>
+          </p:nvSpPr>
+          <p:spPr>
+            <a:xfrm>
+              <a:off x="1265086" y="2646092"/>
+              <a:ext cx="1294545" cy="523220"/>
+            </a:xfrm>
+            <a:prstGeom prst="rect">
+              <a:avLst/>
+            </a:prstGeom>
+            <a:noFill/>
+          </p:spPr>
+          <p:txBody>
+            <a:bodyPr wrap="square" rtlCol="0">
+              <a:spAutoFit/>
+            </a:bodyPr>
+            <a:lstStyle/>
+            <a:p>
+              <a:r>
+                <a:rPr lang="en-US" sz="2800" b="1" dirty="0">
+                  <a:solidFill>
+                    <a:srgbClr val="0F3D63"/>
+                  </a:solidFill>
+                  <a:latin typeface="Montserrat" panose="00000500000000000000" pitchFamily="2" charset="0"/>
+                </a:rPr>
+                <a:t>58.2%</a:t>
+              </a:r>
+            </a:p>
+          </p:txBody>
+        </p:sp>
+        <p:sp>
+          <p:nvSpPr>
+            <p:cNvPr id="34" name="TextBox 33">
+              <a:extLst>
+                <a:ext uri="{FF2B5EF4-FFF2-40B4-BE49-F238E27FC236}">
+                  <a16:creationId xmlns:a16="http://schemas.microsoft.com/office/drawing/2014/main" id="{E90BA373-B439-2544-EBBB-F607AA21BF70}"/>
+                </a:ext>
+              </a:extLst>
+            </p:cNvPr>
+            <p:cNvSpPr txBox="1"/>
+            <p:nvPr/>
+          </p:nvSpPr>
+          <p:spPr>
+            <a:xfrm>
+              <a:off x="984137" y="3185999"/>
+              <a:ext cx="1856442" cy="338554"/>
+            </a:xfrm>
+            <a:prstGeom prst="rect">
+              <a:avLst/>
+            </a:prstGeom>
+            <a:noFill/>
+          </p:spPr>
+          <p:txBody>
+            <a:bodyPr wrap="square" rtlCol="0">
+              <a:spAutoFit/>
+            </a:bodyPr>
+            <a:lstStyle>
+              <a:defPPr>
+                <a:defRPr lang="en-US"/>
+              </a:defPPr>
+              <a:lvl1pPr algn="ctr">
+                <a:defRPr sz="1400">
+                  <a:solidFill>
+                    <a:schemeClr val="bg1">
+                      <a:lumMod val="50000"/>
+                    </a:schemeClr>
+                  </a:solidFill>
+                  <a:latin typeface="Montserrat" panose="00000500000000000000" pitchFamily="2" charset="0"/>
+                </a:defRPr>
+              </a:lvl1pPr>
+            </a:lstStyle>
+            <a:p>
+              <a:r>
+                <a:rPr lang="en-US" dirty="0"/>
+                <a:t>UK Dominance</a:t>
+              </a:r>
+            </a:p>
+          </p:txBody>
+        </p:sp>
+      </p:grpSp>
+      <p:grpSp>
+        <p:nvGrpSpPr>
+          <p:cNvPr id="35" name="CARD_Q2_JobTitles">
+            <a:extLst>
+              <a:ext uri="{FF2B5EF4-FFF2-40B4-BE49-F238E27FC236}">
+                <a16:creationId xmlns:a16="http://schemas.microsoft.com/office/drawing/2014/main" id="{5D3A9B47-67ED-18EC-BC5B-88DF39CE99E6}"/>
+              </a:ext>
+            </a:extLst>
+          </p:cNvPr>
+          <p:cNvGrpSpPr/>
+          <p:nvPr/>
+        </p:nvGrpSpPr>
+        <p:grpSpPr>
+          <a:xfrm>
+            <a:off x="7321449" y="2452526"/>
+            <a:ext cx="1913990" cy="1130546"/>
+            <a:chOff x="847497" y="2506662"/>
+            <a:chExt cx="1913990" cy="1130546"/>
+          </a:xfrm>
+        </p:grpSpPr>
+        <p:sp>
+          <p:nvSpPr>
+            <p:cNvPr id="36" name="Rectangle: Rounded Corners 35">
+              <a:extLst>
+                <a:ext uri="{FF2B5EF4-FFF2-40B4-BE49-F238E27FC236}">
+                  <a16:creationId xmlns:a16="http://schemas.microsoft.com/office/drawing/2014/main" id="{4A14D518-808B-3CD3-564F-566F0B99269C}"/>
+                </a:ext>
+              </a:extLst>
+            </p:cNvPr>
+            <p:cNvSpPr/>
+            <p:nvPr/>
+          </p:nvSpPr>
+          <p:spPr>
+            <a:xfrm>
+              <a:off x="847497" y="2506662"/>
+              <a:ext cx="1913990" cy="1130546"/>
+            </a:xfrm>
+            <a:prstGeom prst="roundRect">
+              <a:avLst/>
+            </a:prstGeom>
+            <a:solidFill>
+              <a:schemeClr val="bg1"/>
+            </a:solidFill>
+            <a:ln>
+              <a:noFill/>
+            </a:ln>
+            <a:effectLst>
+              <a:outerShdw blurRad="63500" sx="102000" sy="102000" algn="ctr" rotWithShape="0">
+                <a:prstClr val="black">
+                  <a:alpha val="40000"/>
+                </a:prstClr>
+              </a:outerShdw>
+            </a:effectLst>
+          </p:spPr>
+          <p:style>
+            <a:lnRef idx="2">
+              <a:schemeClr val="accent1">
+                <a:shade val="15000"/>
+              </a:schemeClr>
+            </a:lnRef>
+            <a:fillRef idx="1">
+              <a:schemeClr val="accent1"/>
+            </a:fillRef>
+            <a:effectRef idx="0">
+              <a:schemeClr val="accent1"/>
+            </a:effectRef>
+            <a:fontRef idx="minor">
+              <a:schemeClr val="lt1"/>
+            </a:fontRef>
+          </p:style>
+          <p:txBody>
+            <a:bodyPr rtlCol="0" anchor="ctr"/>
+            <a:lstStyle/>
+            <a:p>
+              <a:pPr algn="ctr"/>
+              <a:endParaRPr lang="en-US">
+                <a:latin typeface="Montserrat" panose="00000500000000000000" pitchFamily="2" charset="0"/>
+              </a:endParaRPr>
+            </a:p>
+          </p:txBody>
+        </p:sp>
+        <p:sp>
+          <p:nvSpPr>
+            <p:cNvPr id="37" name="TextBox 36">
+              <a:extLst>
+                <a:ext uri="{FF2B5EF4-FFF2-40B4-BE49-F238E27FC236}">
+                  <a16:creationId xmlns:a16="http://schemas.microsoft.com/office/drawing/2014/main" id="{77475085-1360-AD95-5731-B296D331EAE0}"/>
+                </a:ext>
+              </a:extLst>
+            </p:cNvPr>
+            <p:cNvSpPr txBox="1"/>
+            <p:nvPr/>
+          </p:nvSpPr>
+          <p:spPr>
+            <a:xfrm>
+              <a:off x="1235390" y="2648583"/>
+              <a:ext cx="1252012" cy="523220"/>
+            </a:xfrm>
+            <a:prstGeom prst="rect">
+              <a:avLst/>
+            </a:prstGeom>
+            <a:noFill/>
+          </p:spPr>
+          <p:txBody>
+            <a:bodyPr wrap="square" rtlCol="0">
+              <a:spAutoFit/>
+            </a:bodyPr>
+            <a:lstStyle/>
+            <a:p>
+              <a:r>
+                <a:rPr lang="en-US" sz="2800" b="1" dirty="0">
+                  <a:solidFill>
+                    <a:srgbClr val="0F3D63"/>
+                  </a:solidFill>
+                  <a:latin typeface="Montserrat" panose="00000500000000000000" pitchFamily="2" charset="0"/>
+                </a:rPr>
+                <a:t>82.5%</a:t>
+              </a:r>
+            </a:p>
+          </p:txBody>
+        </p:sp>
+        <p:sp>
+          <p:nvSpPr>
+            <p:cNvPr id="38" name="TextBox 37">
+              <a:extLst>
+                <a:ext uri="{FF2B5EF4-FFF2-40B4-BE49-F238E27FC236}">
+                  <a16:creationId xmlns:a16="http://schemas.microsoft.com/office/drawing/2014/main" id="{A1194ADF-7952-A308-64BF-4D4B4659BB42}"/>
+                </a:ext>
+              </a:extLst>
+            </p:cNvPr>
+            <p:cNvSpPr txBox="1"/>
+            <p:nvPr/>
+          </p:nvSpPr>
+          <p:spPr>
+            <a:xfrm>
+              <a:off x="967327" y="3090393"/>
+              <a:ext cx="1709046" cy="523220"/>
+            </a:xfrm>
+            <a:prstGeom prst="rect">
+              <a:avLst/>
+            </a:prstGeom>
+            <a:noFill/>
+          </p:spPr>
+          <p:txBody>
+            <a:bodyPr wrap="square" rtlCol="0">
+              <a:spAutoFit/>
+            </a:bodyPr>
+            <a:lstStyle>
+              <a:defPPr>
+                <a:defRPr lang="en-US"/>
+              </a:defPPr>
+              <a:lvl1pPr algn="ctr">
+                <a:defRPr sz="1400">
+                  <a:solidFill>
+                    <a:schemeClr val="bg1">
+                      <a:lumMod val="50000"/>
+                    </a:schemeClr>
+                  </a:solidFill>
+                  <a:latin typeface="Montserrat" panose="00000500000000000000" pitchFamily="2" charset="0"/>
+                </a:defRPr>
+              </a:lvl1pPr>
+            </a:lstStyle>
+            <a:p>
+              <a:r>
+                <a:rPr lang="en-US" dirty="0"/>
+                <a:t>Top-2 Concentration</a:t>
+              </a:r>
+            </a:p>
+          </p:txBody>
+        </p:sp>
+      </p:grpSp>
+      <p:grpSp>
+        <p:nvGrpSpPr>
+          <p:cNvPr id="39" name="CARD_Q2_Country">
+            <a:extLst>
+              <a:ext uri="{FF2B5EF4-FFF2-40B4-BE49-F238E27FC236}">
+                <a16:creationId xmlns:a16="http://schemas.microsoft.com/office/drawing/2014/main" id="{735AACB0-EC8B-2F60-A09A-BF6296B72B13}"/>
+              </a:ext>
+            </a:extLst>
+          </p:cNvPr>
+          <p:cNvGrpSpPr/>
+          <p:nvPr/>
+        </p:nvGrpSpPr>
+        <p:grpSpPr>
+          <a:xfrm>
+            <a:off x="9229418" y="2452526"/>
+            <a:ext cx="2493040" cy="1137434"/>
+            <a:chOff x="554962" y="2506662"/>
+            <a:chExt cx="2493040" cy="1137434"/>
+          </a:xfrm>
+        </p:grpSpPr>
+        <p:sp>
+          <p:nvSpPr>
+            <p:cNvPr id="40" name="Rectangle: Rounded Corners 39">
+              <a:extLst>
+                <a:ext uri="{FF2B5EF4-FFF2-40B4-BE49-F238E27FC236}">
+                  <a16:creationId xmlns:a16="http://schemas.microsoft.com/office/drawing/2014/main" id="{454D3785-7787-69FF-C06D-47CF776BF7E8}"/>
+                </a:ext>
+              </a:extLst>
+            </p:cNvPr>
+            <p:cNvSpPr/>
+            <p:nvPr/>
+          </p:nvSpPr>
+          <p:spPr>
+            <a:xfrm>
+              <a:off x="847497" y="2506662"/>
+              <a:ext cx="1913990" cy="1130546"/>
+            </a:xfrm>
+            <a:prstGeom prst="roundRect">
+              <a:avLst/>
+            </a:prstGeom>
+            <a:solidFill>
+              <a:schemeClr val="bg1"/>
+            </a:solidFill>
+            <a:ln>
+              <a:noFill/>
+            </a:ln>
+            <a:effectLst>
+              <a:outerShdw blurRad="63500" sx="102000" sy="102000" algn="ctr" rotWithShape="0">
+                <a:prstClr val="black">
+                  <a:alpha val="40000"/>
+                </a:prstClr>
+              </a:outerShdw>
+            </a:effectLst>
+          </p:spPr>
+          <p:style>
+            <a:lnRef idx="2">
+              <a:schemeClr val="accent1">
+                <a:shade val="15000"/>
+              </a:schemeClr>
+            </a:lnRef>
+            <a:fillRef idx="1">
+              <a:schemeClr val="accent1"/>
+            </a:fillRef>
+            <a:effectRef idx="0">
+              <a:schemeClr val="accent1"/>
+            </a:effectRef>
+            <a:fontRef idx="minor">
+              <a:schemeClr val="lt1"/>
+            </a:fontRef>
+          </p:style>
+          <p:txBody>
+            <a:bodyPr rtlCol="0" anchor="ctr"/>
+            <a:lstStyle/>
+            <a:p>
+              <a:pPr algn="ctr"/>
+              <a:endParaRPr lang="en-US">
+                <a:latin typeface="Montserrat" panose="00000500000000000000" pitchFamily="2" charset="0"/>
+              </a:endParaRPr>
+            </a:p>
+          </p:txBody>
+        </p:sp>
+        <p:sp>
+          <p:nvSpPr>
+            <p:cNvPr id="41" name="TextBox 40">
+              <a:extLst>
+                <a:ext uri="{FF2B5EF4-FFF2-40B4-BE49-F238E27FC236}">
+                  <a16:creationId xmlns:a16="http://schemas.microsoft.com/office/drawing/2014/main" id="{6AB0619C-B350-5233-6BCE-06005A09468D}"/>
+                </a:ext>
+              </a:extLst>
+            </p:cNvPr>
+            <p:cNvSpPr txBox="1"/>
+            <p:nvPr/>
+          </p:nvSpPr>
+          <p:spPr>
+            <a:xfrm>
+              <a:off x="1603073" y="2642486"/>
+              <a:ext cx="402837" cy="523220"/>
+            </a:xfrm>
+            <a:prstGeom prst="rect">
+              <a:avLst/>
+            </a:prstGeom>
+            <a:noFill/>
+          </p:spPr>
+          <p:txBody>
+            <a:bodyPr wrap="square" rtlCol="0">
+              <a:spAutoFit/>
+            </a:bodyPr>
+            <a:lstStyle/>
+            <a:p>
+              <a:r>
+                <a:rPr lang="en-US" sz="2800" b="1" dirty="0">
+                  <a:solidFill>
+                    <a:srgbClr val="0F3D63"/>
+                  </a:solidFill>
+                  <a:latin typeface="Montserrat" panose="00000500000000000000" pitchFamily="2" charset="0"/>
+                </a:rPr>
+                <a:t>3</a:t>
+              </a:r>
+            </a:p>
+          </p:txBody>
+        </p:sp>
+        <p:sp>
+          <p:nvSpPr>
+            <p:cNvPr id="42" name="TextBox 41">
+              <a:extLst>
+                <a:ext uri="{FF2B5EF4-FFF2-40B4-BE49-F238E27FC236}">
+                  <a16:creationId xmlns:a16="http://schemas.microsoft.com/office/drawing/2014/main" id="{7A5383C3-EA51-C13C-484E-E9978EE75A60}"/>
+                </a:ext>
+              </a:extLst>
+            </p:cNvPr>
+            <p:cNvSpPr txBox="1"/>
+            <p:nvPr/>
+          </p:nvSpPr>
+          <p:spPr>
+            <a:xfrm>
+              <a:off x="554962" y="3120876"/>
+              <a:ext cx="2493040" cy="523220"/>
+            </a:xfrm>
+            <a:prstGeom prst="rect">
+              <a:avLst/>
+            </a:prstGeom>
+            <a:noFill/>
+          </p:spPr>
+          <p:txBody>
+            <a:bodyPr wrap="square" rtlCol="0">
+              <a:spAutoFit/>
+            </a:bodyPr>
+            <a:lstStyle>
+              <a:defPPr>
+                <a:defRPr lang="en-US"/>
+              </a:defPPr>
+              <a:lvl1pPr algn="ctr">
+                <a:defRPr sz="1400">
+                  <a:solidFill>
+                    <a:schemeClr val="bg1">
+                      <a:lumMod val="50000"/>
+                    </a:schemeClr>
+                  </a:solidFill>
+                  <a:latin typeface="Montserrat" panose="00000500000000000000" pitchFamily="2" charset="0"/>
+                </a:defRPr>
+              </a:lvl1pPr>
+            </a:lstStyle>
+            <a:p>
+              <a:r>
+                <a:rPr lang="en-US" dirty="0"/>
+                <a:t>Growth Markets with potential</a:t>
+              </a:r>
+            </a:p>
+          </p:txBody>
+        </p:sp>
+      </p:grpSp>
+      <p:sp>
+        <p:nvSpPr>
+          <p:cNvPr id="7" name="TITLE_Q2Performance">
+            <a:extLst>
+              <a:ext uri="{FF2B5EF4-FFF2-40B4-BE49-F238E27FC236}">
+                <a16:creationId xmlns:a16="http://schemas.microsoft.com/office/drawing/2014/main" id="{2431838C-BFC7-E3BF-C98B-1C743EF159CF}"/>
+              </a:ext>
+            </a:extLst>
+          </p:cNvPr>
+          <p:cNvSpPr>
+            <a:spLocks noGrp="1"/>
+          </p:cNvSpPr>
+          <p:nvPr>
+            <p:ph type="title"/>
+          </p:nvPr>
+        </p:nvSpPr>
+        <p:spPr>
+          <a:xfrm>
+            <a:off x="619159" y="27718"/>
+            <a:ext cx="10515600" cy="1325563"/>
+          </a:xfrm>
+        </p:spPr>
+        <p:txBody>
+          <a:bodyPr wrap="square">
+            <a:normAutofit/>
+          </a:bodyPr>
+          <a:lstStyle/>
+          <a:p>
+            <a:pPr algn="l"/>
+            <a:r>
+              <a:rPr lang="en-US" sz="3000" b="1" i="0" dirty="0">
+                <a:solidFill>
+                  <a:schemeClr val="accent1"/>
+                </a:solidFill>
+                <a:latin typeface="Montserrat" panose="00000500000000000000" pitchFamily="2" charset="0"/>
+              </a:rPr>
+              <a:t>Pipeline Geography: Understanding Market Concentration</a:t>
+            </a:r>
+            <a:endParaRPr sz="3000" b="1" i="0" dirty="0">
+              <a:solidFill>
+                <a:schemeClr val="accent1"/>
+              </a:solidFill>
+              <a:latin typeface="Montserrat" panose="00000500000000000000" pitchFamily="2" charset="0"/>
+            </a:endParaRPr>
+          </a:p>
+        </p:txBody>
+      </p:sp>
+    </p:spTree>
+    <p:extLst>
+      <p:ext uri="{BB962C8B-B14F-4D97-AF65-F5344CB8AC3E}">
+        <p14:creationId xmlns:p14="http://schemas.microsoft.com/office/powerpoint/2010/main" val="140167898"/>
+      </p:ext>
+    </p:extLst>
+  </p:cSld>
+  <p:clrMapOvr>
+    <a:masterClrMapping/>
+  </p:clrMapOvr>
+</p:sld>
+</file>
+
+<file path=ppt/slides/slide25.xml><?xml version="1.0" encoding="utf-8"?>
+<p:sld xmlns:a="http://schemas.openxmlformats.org/drawingml/2006/main" xmlns:r="http://schemas.openxmlformats.org/officeDocument/2006/relationships" xmlns:p="http://schemas.openxmlformats.org/presentationml/2006/main">
+  <p:cSld>
+    <p:spTree>
+      <p:nvGrpSpPr>
+        <p:cNvPr id="1" name="">
+          <a:extLst>
+            <a:ext uri="{FF2B5EF4-FFF2-40B4-BE49-F238E27FC236}">
               <a16:creationId xmlns:a16="http://schemas.microsoft.com/office/drawing/2014/main" id="{FFCF52A7-1E76-9578-C514-69E68950FD8A}"/>
             </a:ext>
           </a:extLst>
@@ -19363,7 +21917,7 @@
 </p:sld>
 </file>
 
-<file path=ppt/slides/slide23.xml><?xml version="1.0" encoding="utf-8"?>
+<file path=ppt/slides/slide26.xml><?xml version="1.0" encoding="utf-8"?>
 <p:sld xmlns:a="http://schemas.openxmlformats.org/drawingml/2006/main" xmlns:r="http://schemas.openxmlformats.org/officeDocument/2006/relationships" xmlns:p="http://schemas.openxmlformats.org/presentationml/2006/main">
   <p:cSld>
     <p:spTree>
@@ -20260,7 +22814,7 @@
 </p:sld>
 </file>
 
-<file path=ppt/slides/slide24.xml><?xml version="1.0" encoding="utf-8"?>
+<file path=ppt/slides/slide27.xml><?xml version="1.0" encoding="utf-8"?>
 <p:sld xmlns:a="http://schemas.openxmlformats.org/drawingml/2006/main" xmlns:r="http://schemas.openxmlformats.org/officeDocument/2006/relationships" xmlns:p="http://schemas.openxmlformats.org/presentationml/2006/main">
   <p:cSld>
     <p:spTree>
@@ -20513,7 +23067,7 @@
 </p:sld>
 </file>
 
-<file path=ppt/slides/slide25.xml><?xml version="1.0" encoding="utf-8"?>
+<file path=ppt/slides/slide28.xml><?xml version="1.0" encoding="utf-8"?>
 <p:sld xmlns:a="http://schemas.openxmlformats.org/drawingml/2006/main" xmlns:r="http://schemas.openxmlformats.org/officeDocument/2006/relationships" xmlns:p="http://schemas.openxmlformats.org/presentationml/2006/main">
   <p:cSld>
     <p:spTree>
@@ -20742,7 +23296,7 @@
 </p:sld>
 </file>
 
-<file path=ppt/slides/slide26.xml><?xml version="1.0" encoding="utf-8"?>
+<file path=ppt/slides/slide29.xml><?xml version="1.0" encoding="utf-8"?>
 <p:sld xmlns:a="http://schemas.openxmlformats.org/drawingml/2006/main" xmlns:r="http://schemas.openxmlformats.org/officeDocument/2006/relationships" xmlns:p="http://schemas.openxmlformats.org/presentationml/2006/main">
   <p:cSld>
     <p:spTree>
@@ -21439,101 +23993,6 @@
 </p:sld>
 </file>
 
-<file path=ppt/slides/slide27.xml><?xml version="1.0" encoding="utf-8"?>
-<p:sld xmlns:a="http://schemas.openxmlformats.org/drawingml/2006/main" xmlns:r="http://schemas.openxmlformats.org/officeDocument/2006/relationships" xmlns:p="http://schemas.openxmlformats.org/presentationml/2006/main">
-  <p:cSld>
-    <p:spTree>
-      <p:nvGrpSpPr>
-        <p:cNvPr id="1" name=""/>
-        <p:cNvGrpSpPr/>
-        <p:nvPr/>
-      </p:nvGrpSpPr>
-      <p:grpSpPr>
-        <a:xfrm>
-          <a:off x="0" y="0"/>
-          <a:ext cx="0" cy="0"/>
-          <a:chOff x="0" y="0"/>
-          <a:chExt cx="0" cy="0"/>
-        </a:xfrm>
-      </p:grpSpPr>
-      <p:sp>
-        <p:nvSpPr>
-          <p:cNvPr id="2" name="TITLE_ThankYou"/>
-          <p:cNvSpPr txBox="1"/>
-          <p:nvPr/>
-        </p:nvSpPr>
-        <p:spPr>
-          <a:xfrm>
-            <a:off x="822960" y="2880360"/>
-            <a:ext cx="8229600" cy="677108"/>
-          </a:xfrm>
-          <a:prstGeom prst="rect">
-            <a:avLst/>
-          </a:prstGeom>
-          <a:noFill/>
-        </p:spPr>
-        <p:txBody>
-          <a:bodyPr wrap="square" lIns="0" tIns="0" rIns="0" bIns="0" anchor="t">
-            <a:spAutoFit/>
-          </a:bodyPr>
-          <a:lstStyle/>
-          <a:p>
-            <a:pPr algn="l"/>
-            <a:r>
-              <a:rPr sz="4400" b="1" i="0">
-                <a:solidFill>
-                  <a:srgbClr val="FFFFFF"/>
-                </a:solidFill>
-                <a:latin typeface="Montserrat" panose="00000500000000000000" pitchFamily="2" charset="0"/>
-              </a:rPr>
-              <a:t>Thank You</a:t>
-            </a:r>
-          </a:p>
-        </p:txBody>
-      </p:sp>
-      <p:sp>
-        <p:nvSpPr>
-          <p:cNvPr id="3" name="AI_ClosingMessage"/>
-          <p:cNvSpPr txBox="1"/>
-          <p:nvPr/>
-        </p:nvSpPr>
-        <p:spPr>
-          <a:xfrm>
-            <a:off x="841248" y="3703320"/>
-            <a:ext cx="7772400" cy="246221"/>
-          </a:xfrm>
-          <a:prstGeom prst="rect">
-            <a:avLst/>
-          </a:prstGeom>
-          <a:noFill/>
-        </p:spPr>
-        <p:txBody>
-          <a:bodyPr wrap="square" lIns="0" tIns="0" rIns="0" bIns="0" anchor="t">
-            <a:spAutoFit/>
-          </a:bodyPr>
-          <a:lstStyle/>
-          <a:p>
-            <a:pPr algn="l"/>
-            <a:r>
-              <a:rPr sz="1600" b="0" i="0">
-                <a:solidFill>
-                  <a:srgbClr val="E8E8E8"/>
-                </a:solidFill>
-                <a:latin typeface="Montserrat" panose="00000500000000000000" pitchFamily="2" charset="0"/>
-              </a:rPr>
-              <a:t>Questions? Let’s discuss how we build on H1 momentum together.</a:t>
-            </a:r>
-          </a:p>
-        </p:txBody>
-      </p:sp>
-    </p:spTree>
-  </p:cSld>
-  <p:clrMapOvr>
-    <a:masterClrMapping/>
-  </p:clrMapOvr>
-</p:sld>
-</file>
-
 <file path=ppt/slides/slide3.xml><?xml version="1.0" encoding="utf-8"?>
 <p:sld xmlns:a="http://schemas.openxmlformats.org/drawingml/2006/main" xmlns:r="http://schemas.openxmlformats.org/officeDocument/2006/relationships" xmlns:p="http://schemas.openxmlformats.org/presentationml/2006/main">
   <p:cSld>
@@ -21808,6 +24267,101 @@
                 <a:latin typeface="Montserrat Medium" panose="00000600000000000000" pitchFamily="2" charset="0"/>
               </a:rPr>
               <a:t>Lead volume held stable while unique account reach expanded sharply – the campaign is converting a wider base of healthcare organizations, not just repeat engagement from the same accounts.</a:t>
+            </a:r>
+          </a:p>
+        </p:txBody>
+      </p:sp>
+    </p:spTree>
+  </p:cSld>
+  <p:clrMapOvr>
+    <a:masterClrMapping/>
+  </p:clrMapOvr>
+</p:sld>
+</file>
+
+<file path=ppt/slides/slide30.xml><?xml version="1.0" encoding="utf-8"?>
+<p:sld xmlns:a="http://schemas.openxmlformats.org/drawingml/2006/main" xmlns:r="http://schemas.openxmlformats.org/officeDocument/2006/relationships" xmlns:p="http://schemas.openxmlformats.org/presentationml/2006/main">
+  <p:cSld>
+    <p:spTree>
+      <p:nvGrpSpPr>
+        <p:cNvPr id="1" name=""/>
+        <p:cNvGrpSpPr/>
+        <p:nvPr/>
+      </p:nvGrpSpPr>
+      <p:grpSpPr>
+        <a:xfrm>
+          <a:off x="0" y="0"/>
+          <a:ext cx="0" cy="0"/>
+          <a:chOff x="0" y="0"/>
+          <a:chExt cx="0" cy="0"/>
+        </a:xfrm>
+      </p:grpSpPr>
+      <p:sp>
+        <p:nvSpPr>
+          <p:cNvPr id="2" name="TITLE_ThankYou"/>
+          <p:cNvSpPr txBox="1"/>
+          <p:nvPr/>
+        </p:nvSpPr>
+        <p:spPr>
+          <a:xfrm>
+            <a:off x="822960" y="2880360"/>
+            <a:ext cx="8229600" cy="677108"/>
+          </a:xfrm>
+          <a:prstGeom prst="rect">
+            <a:avLst/>
+          </a:prstGeom>
+          <a:noFill/>
+        </p:spPr>
+        <p:txBody>
+          <a:bodyPr wrap="square" lIns="0" tIns="0" rIns="0" bIns="0" anchor="t">
+            <a:spAutoFit/>
+          </a:bodyPr>
+          <a:lstStyle/>
+          <a:p>
+            <a:pPr algn="l"/>
+            <a:r>
+              <a:rPr sz="4400" b="1" i="0">
+                <a:solidFill>
+                  <a:srgbClr val="FFFFFF"/>
+                </a:solidFill>
+                <a:latin typeface="Montserrat" panose="00000500000000000000" pitchFamily="2" charset="0"/>
+              </a:rPr>
+              <a:t>Thank You</a:t>
+            </a:r>
+          </a:p>
+        </p:txBody>
+      </p:sp>
+      <p:sp>
+        <p:nvSpPr>
+          <p:cNvPr id="3" name="AI_ClosingMessage"/>
+          <p:cNvSpPr txBox="1"/>
+          <p:nvPr/>
+        </p:nvSpPr>
+        <p:spPr>
+          <a:xfrm>
+            <a:off x="841248" y="3703320"/>
+            <a:ext cx="7772400" cy="246221"/>
+          </a:xfrm>
+          <a:prstGeom prst="rect">
+            <a:avLst/>
+          </a:prstGeom>
+          <a:noFill/>
+        </p:spPr>
+        <p:txBody>
+          <a:bodyPr wrap="square" lIns="0" tIns="0" rIns="0" bIns="0" anchor="t">
+            <a:spAutoFit/>
+          </a:bodyPr>
+          <a:lstStyle/>
+          <a:p>
+            <a:pPr algn="l"/>
+            <a:r>
+              <a:rPr sz="1600" b="0" i="0">
+                <a:solidFill>
+                  <a:srgbClr val="E8E8E8"/>
+                </a:solidFill>
+                <a:latin typeface="Montserrat" panose="00000500000000000000" pitchFamily="2" charset="0"/>
+              </a:rPr>
+              <a:t>Questions? Let’s discuss how we build on H1 momentum together.</a:t>
             </a:r>
           </a:p>
         </p:txBody>
